--- a/examples/preview/subjects/英语.pptx
+++ b/examples/preview/subjects/英语.pptx
@@ -3106,14 +3106,14 @@
         </p:nvSpPr>
         <p:spPr>
           <a:xfrm>
-            <a:off x="6095847" y="0"/>
-            <a:ext cx="6095847" cy="6858000"/>
+            <a:off x="0" y="0"/>
+            <a:ext cx="12191695" cy="6858000"/>
           </a:xfrm>
           <a:prstGeom prst="rect">
             <a:avLst/>
           </a:prstGeom>
           <a:solidFill>
-            <a:srgbClr val="1B2559"/>
+            <a:srgbClr val="FFFFFF"/>
           </a:solidFill>
           <a:ln>
             <a:noFill/>
@@ -3144,20 +3144,20 @@
       </p:sp>
       <p:sp>
         <p:nvSpPr>
-          <p:cNvPr id="3" name="Rectangle 2"/>
+          <p:cNvPr id="3" name="Rounded Rectangle 2"/>
           <p:cNvSpPr/>
           <p:nvPr/>
         </p:nvSpPr>
         <p:spPr>
           <a:xfrm>
-            <a:off x="6040983" y="0"/>
-            <a:ext cx="91440" cy="6858000"/>
-          </a:xfrm>
-          <a:prstGeom prst="rect">
+            <a:off x="10042855" y="256032"/>
+            <a:ext cx="960120" cy="182880"/>
+          </a:xfrm>
+          <a:prstGeom prst="roundRect">
             <a:avLst/>
           </a:prstGeom>
           <a:solidFill>
-            <a:srgbClr val="D6336C"/>
+            <a:srgbClr val="BFE8EA"/>
           </a:solidFill>
           <a:ln>
             <a:noFill/>
@@ -3188,20 +3188,20 @@
       </p:sp>
       <p:sp>
         <p:nvSpPr>
-          <p:cNvPr id="4" name="Rectangle 3"/>
+          <p:cNvPr id="4" name="Rounded Rectangle 3"/>
           <p:cNvSpPr/>
           <p:nvPr/>
         </p:nvSpPr>
         <p:spPr>
           <a:xfrm>
-            <a:off x="0" y="0"/>
-            <a:ext cx="201168" cy="6858000"/>
-          </a:xfrm>
-          <a:prstGeom prst="rect">
+            <a:off x="11140135" y="713232"/>
+            <a:ext cx="658368" cy="182880"/>
+          </a:xfrm>
+          <a:prstGeom prst="roundRect">
             <a:avLst/>
           </a:prstGeom>
           <a:solidFill>
-            <a:srgbClr val="E6E9FB"/>
+            <a:srgbClr val="FBF3C4"/>
           </a:solidFill>
           <a:ln>
             <a:noFill/>
@@ -3232,14 +3232,58 @@
       </p:sp>
       <p:sp>
         <p:nvSpPr>
-          <p:cNvPr id="5" name="TextBox 4"/>
+          <p:cNvPr id="5" name="Rectangle 4"/>
+          <p:cNvSpPr/>
+          <p:nvPr/>
+        </p:nvSpPr>
+        <p:spPr>
+          <a:xfrm>
+            <a:off x="0" y="0"/>
+            <a:ext cx="12191695" cy="109728"/>
+          </a:xfrm>
+          <a:prstGeom prst="rect">
+            <a:avLst/>
+          </a:prstGeom>
+          <a:solidFill>
+            <a:srgbClr val="00A5B5"/>
+          </a:solidFill>
+          <a:ln>
+            <a:noFill/>
+          </a:ln>
+          <a:effectLst/>
+        </p:spPr>
+        <p:style>
+          <a:lnRef idx="1">
+            <a:schemeClr val="accent1"/>
+          </a:lnRef>
+          <a:fillRef idx="3">
+            <a:schemeClr val="accent1"/>
+          </a:fillRef>
+          <a:effectRef idx="2">
+            <a:schemeClr val="accent1"/>
+          </a:effectRef>
+          <a:fontRef idx="minor">
+            <a:schemeClr val="lt1"/>
+          </a:fontRef>
+        </p:style>
+        <p:txBody>
+          <a:bodyPr rtlCol="0" anchor="ctr"/>
+          <a:lstStyle/>
+          <a:p>
+            <a:pPr algn="ctr"/>
+          </a:p>
+        </p:txBody>
+      </p:sp>
+      <p:sp>
+        <p:nvSpPr>
+          <p:cNvPr id="6" name="TextBox 5"/>
           <p:cNvSpPr txBox="1"/>
           <p:nvPr/>
         </p:nvSpPr>
         <p:spPr>
           <a:xfrm>
-            <a:off x="868680" y="1828800"/>
-            <a:ext cx="5364345" cy="2194560"/>
+            <a:off x="868680" y="1463040"/>
+            <a:ext cx="9753356" cy="1737360"/>
           </a:xfrm>
           <a:prstGeom prst="rect">
             <a:avLst/>
@@ -3256,12 +3300,12 @@
               <a:lnSpc>
                 <a:spcPct val="120000"/>
               </a:lnSpc>
-              <a:defRPr sz="1700"/>
+              <a:defRPr sz="2000"/>
             </a:pPr>
             <a:r>
-              <a:rPr sz="1700" b="1" u="none">
-                <a:solidFill>
-                  <a:srgbClr val="1B2559"/>
+              <a:rPr sz="2000" b="1" u="none">
+                <a:solidFill>
+                  <a:srgbClr val="C00000"/>
                 </a:solidFill>
                 <a:latin typeface="Times New Roman"/>
                 <a:ea typeface="Noto Sans CJK SC"/>
@@ -3273,14 +3317,101 @@
       </p:sp>
       <p:sp>
         <p:nvSpPr>
-          <p:cNvPr id="6" name="TextBox 5"/>
+          <p:cNvPr id="7" name="Rounded Rectangle 6"/>
+          <p:cNvSpPr/>
+          <p:nvPr/>
+        </p:nvSpPr>
+        <p:spPr>
+          <a:xfrm>
+            <a:off x="868680" y="3429000"/>
+            <a:ext cx="3108960" cy="548640"/>
+          </a:xfrm>
+          <a:prstGeom prst="roundRect">
+            <a:avLst>
+              <a:gd name="adj" fmla="val 12000"/>
+            </a:avLst>
+          </a:prstGeom>
+          <a:solidFill>
+            <a:srgbClr val="FFE699"/>
+          </a:solidFill>
+          <a:ln>
+            <a:noFill/>
+          </a:ln>
+          <a:effectLst/>
+        </p:spPr>
+        <p:style>
+          <a:lnRef idx="1">
+            <a:schemeClr val="accent1"/>
+          </a:lnRef>
+          <a:fillRef idx="3">
+            <a:schemeClr val="accent1"/>
+          </a:fillRef>
+          <a:effectRef idx="2">
+            <a:schemeClr val="accent1"/>
+          </a:effectRef>
+          <a:fontRef idx="minor">
+            <a:schemeClr val="lt1"/>
+          </a:fontRef>
+        </p:style>
+        <p:txBody>
+          <a:bodyPr rtlCol="0" anchor="ctr"/>
+          <a:lstStyle/>
+          <a:p>
+            <a:pPr algn="ctr"/>
+          </a:p>
+        </p:txBody>
+      </p:sp>
+      <p:sp>
+        <p:nvSpPr>
+          <p:cNvPr id="8" name="TextBox 7"/>
           <p:cNvSpPr txBox="1"/>
           <p:nvPr/>
         </p:nvSpPr>
         <p:spPr>
           <a:xfrm>
-            <a:off x="6598767" y="1737360"/>
-            <a:ext cx="5120511" cy="2194560"/>
+            <a:off x="868680" y="3456432"/>
+            <a:ext cx="3108960" cy="493776"/>
+          </a:xfrm>
+          <a:prstGeom prst="rect">
+            <a:avLst/>
+          </a:prstGeom>
+          <a:noFill/>
+        </p:spPr>
+        <p:txBody>
+          <a:bodyPr wrap="square" anchor="ctr" lIns="54864" rIns="54864" tIns="0" bIns="0">
+            <a:spAutoFit/>
+          </a:bodyPr>
+          <a:lstStyle/>
+          <a:p>
+            <a:pPr algn="ctr">
+              <a:lnSpc>
+                <a:spcPct val="130000"/>
+              </a:lnSpc>
+              <a:defRPr sz="1700"/>
+            </a:pPr>
+            <a:r>
+              <a:rPr sz="1700" b="1" u="none">
+                <a:solidFill>
+                  <a:srgbClr val="16323A"/>
+                </a:solidFill>
+                <a:latin typeface="Times New Roman"/>
+                <a:ea typeface="Noto Sans CJK SC"/>
+              </a:rPr>
+              <a:t>Learning aims:</a:t>
+            </a:r>
+          </a:p>
+        </p:txBody>
+      </p:sp>
+      <p:sp>
+        <p:nvSpPr>
+          <p:cNvPr id="9" name="TextBox 8"/>
+          <p:cNvSpPr txBox="1"/>
+          <p:nvPr/>
+        </p:nvSpPr>
+        <p:spPr>
+          <a:xfrm>
+            <a:off x="1051560" y="4206240"/>
+            <a:ext cx="9814255" cy="1371600"/>
           </a:xfrm>
           <a:prstGeom prst="rect">
             <a:avLst/>
@@ -3293,16 +3424,26 @@
           </a:bodyPr>
           <a:lstStyle/>
           <a:p>
-            <a:pPr algn="l">
+            <a:pPr algn="l" marL="384048" indent="-384048">
               <a:lnSpc>
-                <a:spcPct val="150000"/>
+                <a:spcPct val="135000"/>
               </a:lnSpc>
-              <a:defRPr sz="1900"/>
+              <a:defRPr sz="1800"/>
             </a:pPr>
             <a:r>
-              <a:rPr sz="1900" b="0" u="none">
-                <a:solidFill>
-                  <a:srgbClr val="FFFFFF"/>
+              <a:rPr sz="1800" b="1" u="none">
+                <a:solidFill>
+                  <a:srgbClr val="0B6E75"/>
+                </a:solidFill>
+                <a:latin typeface="Times New Roman"/>
+                <a:ea typeface="Noto Sans CJK SC"/>
+              </a:rPr>
+              <a:t>1. </a:t>
+            </a:r>
+            <a:r>
+              <a:rPr sz="1800" b="0" u="none">
+                <a:solidFill>
+                  <a:srgbClr val="16323A"/>
                 </a:solidFill>
                 <a:latin typeface="Times New Roman"/>
                 <a:ea typeface="Noto Sans CJK SC"/>
@@ -3314,14 +3455,14 @@
       </p:sp>
       <p:sp>
         <p:nvSpPr>
-          <p:cNvPr id="7" name="TextBox 6"/>
+          <p:cNvPr id="10" name="TextBox 9"/>
           <p:cNvSpPr txBox="1"/>
           <p:nvPr/>
         </p:nvSpPr>
         <p:spPr>
           <a:xfrm>
-            <a:off x="6598767" y="4114800"/>
-            <a:ext cx="5120511" cy="822960"/>
+            <a:off x="1051560" y="5623560"/>
+            <a:ext cx="9814255" cy="457200"/>
           </a:xfrm>
           <a:prstGeom prst="rect">
             <a:avLst/>
@@ -3338,12 +3479,12 @@
               <a:lnSpc>
                 <a:spcPct val="130000"/>
               </a:lnSpc>
-              <a:defRPr sz="1200"/>
+              <a:defRPr sz="1300"/>
             </a:pPr>
             <a:r>
-              <a:rPr sz="1200" b="0" u="none">
-                <a:solidFill>
-                  <a:srgbClr val="C9CEE8"/>
+              <a:rPr sz="1300" b="0" u="none">
+                <a:solidFill>
+                  <a:srgbClr val="7A8698"/>
                 </a:solidFill>
                 <a:latin typeface="Times New Roman"/>
                 <a:ea typeface="Noto Sans CJK SC"/>
@@ -3355,14 +3496,60 @@
       </p:sp>
       <p:sp>
         <p:nvSpPr>
-          <p:cNvPr id="8" name="TextBox 7"/>
+          <p:cNvPr id="11" name="Rounded Rectangle 10"/>
+          <p:cNvSpPr/>
+          <p:nvPr/>
+        </p:nvSpPr>
+        <p:spPr>
+          <a:xfrm>
+            <a:off x="10600639" y="841248"/>
+            <a:ext cx="859536" cy="420624"/>
+          </a:xfrm>
+          <a:prstGeom prst="roundRect">
+            <a:avLst>
+              <a:gd name="adj" fmla="val 30000"/>
+            </a:avLst>
+          </a:prstGeom>
+          <a:solidFill>
+            <a:srgbClr val="00A5B5"/>
+          </a:solidFill>
+          <a:ln>
+            <a:noFill/>
+          </a:ln>
+          <a:effectLst/>
+        </p:spPr>
+        <p:style>
+          <a:lnRef idx="1">
+            <a:schemeClr val="accent1"/>
+          </a:lnRef>
+          <a:fillRef idx="3">
+            <a:schemeClr val="accent1"/>
+          </a:fillRef>
+          <a:effectRef idx="2">
+            <a:schemeClr val="accent1"/>
+          </a:effectRef>
+          <a:fontRef idx="minor">
+            <a:schemeClr val="lt1"/>
+          </a:fontRef>
+        </p:style>
+        <p:txBody>
+          <a:bodyPr rtlCol="0" anchor="ctr"/>
+          <a:lstStyle/>
+          <a:p>
+            <a:pPr algn="ctr"/>
+          </a:p>
+        </p:txBody>
+      </p:sp>
+      <p:sp>
+        <p:nvSpPr>
+          <p:cNvPr id="12" name="TextBox 11"/>
           <p:cNvSpPr txBox="1"/>
           <p:nvPr/>
         </p:nvSpPr>
         <p:spPr>
           <a:xfrm>
-            <a:off x="6644487" y="5394960"/>
-            <a:ext cx="4876678" cy="457200"/>
+            <a:off x="10600639" y="868680"/>
+            <a:ext cx="859536" cy="365760"/>
           </a:xfrm>
           <a:prstGeom prst="rect">
             <a:avLst/>
@@ -3370,21 +3557,21 @@
           <a:noFill/>
         </p:spPr>
         <p:txBody>
-          <a:bodyPr wrap="square" anchor="t" lIns="54864" rIns="54864" tIns="0" bIns="0">
+          <a:bodyPr wrap="square" anchor="ctr" lIns="54864" rIns="54864" tIns="0" bIns="0">
             <a:spAutoFit/>
           </a:bodyPr>
           <a:lstStyle/>
           <a:p>
-            <a:pPr algn="r">
+            <a:pPr algn="ctr">
               <a:lnSpc>
                 <a:spcPct val="130000"/>
               </a:lnSpc>
-              <a:defRPr sz="1400"/>
+              <a:defRPr sz="1300"/>
             </a:pPr>
             <a:r>
-              <a:rPr sz="1400" b="1" u="none">
-                <a:solidFill>
-                  <a:srgbClr val="D6336C"/>
+              <a:rPr sz="1300" b="1" u="none">
+                <a:solidFill>
+                  <a:srgbClr val="FFFFFF"/>
                 </a:solidFill>
                 <a:latin typeface="Times New Roman"/>
                 <a:ea typeface="Noto Sans CJK SC"/>
@@ -3414,20 +3601,20 @@
       <p:grpSpPr/>
       <p:sp>
         <p:nvSpPr>
-          <p:cNvPr id="2" name="Rectangle 1"/>
+          <p:cNvPr id="2" name="Rounded Rectangle 1"/>
           <p:cNvSpPr/>
           <p:nvPr/>
         </p:nvSpPr>
         <p:spPr>
           <a:xfrm>
-            <a:off x="0" y="0"/>
-            <a:ext cx="201168" cy="6858000"/>
-          </a:xfrm>
-          <a:prstGeom prst="rect">
+            <a:off x="10042855" y="256032"/>
+            <a:ext cx="960120" cy="182880"/>
+          </a:xfrm>
+          <a:prstGeom prst="roundRect">
             <a:avLst/>
           </a:prstGeom>
           <a:solidFill>
-            <a:srgbClr val="E6E9FB"/>
+            <a:srgbClr val="BFE8EA"/>
           </a:solidFill>
           <a:ln>
             <a:noFill/>
@@ -3458,20 +3645,20 @@
       </p:sp>
       <p:sp>
         <p:nvSpPr>
-          <p:cNvPr id="3" name="Rectangle 2"/>
+          <p:cNvPr id="3" name="Rounded Rectangle 2"/>
           <p:cNvSpPr/>
           <p:nvPr/>
         </p:nvSpPr>
         <p:spPr>
           <a:xfrm>
-            <a:off x="0" y="0"/>
-            <a:ext cx="7558850" cy="91440"/>
-          </a:xfrm>
-          <a:prstGeom prst="rect">
+            <a:off x="11140135" y="713232"/>
+            <a:ext cx="658368" cy="182880"/>
+          </a:xfrm>
+          <a:prstGeom prst="roundRect">
             <a:avLst/>
           </a:prstGeom>
           <a:solidFill>
-            <a:srgbClr val="1B2559"/>
+            <a:srgbClr val="FBF3C4"/>
           </a:solidFill>
           <a:ln>
             <a:noFill/>
@@ -3502,20 +3689,22 @@
       </p:sp>
       <p:sp>
         <p:nvSpPr>
-          <p:cNvPr id="4" name="Rectangle 3"/>
+          <p:cNvPr id="4" name="Rounded Rectangle 3"/>
           <p:cNvSpPr/>
           <p:nvPr/>
         </p:nvSpPr>
         <p:spPr>
           <a:xfrm>
-            <a:off x="7558850" y="0"/>
-            <a:ext cx="4632844" cy="91440"/>
-          </a:xfrm>
-          <a:prstGeom prst="rect">
-            <a:avLst/>
+            <a:off x="548640" y="365760"/>
+            <a:ext cx="2249424" cy="566928"/>
+          </a:xfrm>
+          <a:prstGeom prst="roundRect">
+            <a:avLst>
+              <a:gd name="adj" fmla="val 12000"/>
+            </a:avLst>
           </a:prstGeom>
           <a:solidFill>
-            <a:srgbClr val="D6336C"/>
+            <a:srgbClr val="00A5B5"/>
           </a:solidFill>
           <a:ln>
             <a:noFill/>
@@ -3553,7 +3742,7 @@
         <p:spPr>
           <a:xfrm>
             <a:off x="548640" y="384048"/>
-            <a:ext cx="9265615" cy="640080"/>
+            <a:ext cx="2249424" cy="530352"/>
           </a:xfrm>
           <a:prstGeom prst="rect">
             <a:avLst/>
@@ -3566,21 +3755,21 @@
           </a:bodyPr>
           <a:lstStyle/>
           <a:p>
-            <a:pPr algn="l">
+            <a:pPr algn="ctr">
               <a:lnSpc>
                 <a:spcPct val="130000"/>
               </a:lnSpc>
-              <a:defRPr sz="2800"/>
+              <a:defRPr sz="2300"/>
             </a:pPr>
             <a:r>
-              <a:rPr sz="2800" b="1" u="none">
-                <a:solidFill>
-                  <a:srgbClr val="1B2559"/>
+              <a:rPr sz="2300" b="1" u="none">
+                <a:solidFill>
+                  <a:srgbClr val="FFFFFF"/>
                 </a:solidFill>
                 <a:latin typeface="Times New Roman"/>
                 <a:ea typeface="Noto Sans CJK SC"/>
               </a:rPr>
-              <a:t>参考答案</a:t>
+              <a:t>【参考答案】</a:t>
             </a:r>
           </a:p>
         </p:txBody>
@@ -3588,47 +3777,6 @@
       <p:sp>
         <p:nvSpPr>
           <p:cNvPr id="6" name="TextBox 5"/>
-          <p:cNvSpPr txBox="1"/>
-          <p:nvPr/>
-        </p:nvSpPr>
-        <p:spPr>
-          <a:xfrm>
-            <a:off x="9082735" y="457200"/>
-            <a:ext cx="2606040" cy="457200"/>
-          </a:xfrm>
-          <a:prstGeom prst="rect">
-            <a:avLst/>
-          </a:prstGeom>
-          <a:noFill/>
-        </p:spPr>
-        <p:txBody>
-          <a:bodyPr wrap="square" anchor="t" lIns="54864" rIns="54864" tIns="0" bIns="0">
-            <a:spAutoFit/>
-          </a:bodyPr>
-          <a:lstStyle/>
-          <a:p>
-            <a:pPr algn="r">
-              <a:lnSpc>
-                <a:spcPct val="130000"/>
-              </a:lnSpc>
-              <a:defRPr sz="1200"/>
-            </a:pPr>
-            <a:r>
-              <a:rPr sz="1200" b="1" u="none">
-                <a:solidFill>
-                  <a:srgbClr val="D6336C"/>
-                </a:solidFill>
-                <a:latin typeface="Times New Roman"/>
-                <a:ea typeface="Noto Sans CJK SC"/>
-              </a:rPr>
-              <a:t>答案</a:t>
-            </a:r>
-          </a:p>
-        </p:txBody>
-      </p:sp>
-      <p:sp>
-        <p:nvSpPr>
-          <p:cNvPr id="7" name="TextBox 6"/>
           <p:cNvSpPr txBox="1"/>
           <p:nvPr/>
         </p:nvSpPr>
@@ -3657,7 +3805,7 @@
             <a:r>
               <a:rPr sz="2600" b="0" u="none">
                 <a:solidFill>
-                  <a:srgbClr val="1A1F36"/>
+                  <a:srgbClr val="16323A"/>
                 </a:solidFill>
                 <a:latin typeface="Times New Roman"/>
                 <a:ea typeface="Noto Sans CJK SC"/>
@@ -3677,7 +3825,7 @@
             <a:r>
               <a:rPr sz="2600" b="0" u="none">
                 <a:solidFill>
-                  <a:srgbClr val="D6336C"/>
+                  <a:srgbClr val="00A5B5"/>
                 </a:solidFill>
                 <a:latin typeface="Times New Roman"/>
                 <a:ea typeface="Noto Sans CJK SC"/>
@@ -3687,7 +3835,7 @@
             <a:r>
               <a:rPr sz="2600" b="0" u="none">
                 <a:solidFill>
-                  <a:srgbClr val="1A1F36"/>
+                  <a:srgbClr val="16323A"/>
                 </a:solidFill>
                 <a:latin typeface="Times New Roman"/>
                 <a:ea typeface="Noto Sans CJK SC"/>
@@ -3699,7 +3847,7 @@
       </p:sp>
       <p:sp>
         <p:nvSpPr>
-          <p:cNvPr id="8" name="Rectangle 7"/>
+          <p:cNvPr id="7" name="Rectangle 6"/>
           <p:cNvSpPr/>
           <p:nvPr/>
         </p:nvSpPr>
@@ -3712,7 +3860,7 @@
             <a:avLst/>
           </a:prstGeom>
           <a:solidFill>
-            <a:srgbClr val="D6336C"/>
+            <a:srgbClr val="00A5B5"/>
           </a:solidFill>
           <a:ln>
             <a:noFill/>
@@ -3743,14 +3891,14 @@
       </p:sp>
       <p:sp>
         <p:nvSpPr>
-          <p:cNvPr id="9" name="TextBox 8"/>
+          <p:cNvPr id="8" name="TextBox 7"/>
           <p:cNvSpPr txBox="1"/>
           <p:nvPr/>
         </p:nvSpPr>
         <p:spPr>
           <a:xfrm>
             <a:off x="548640" y="6345936"/>
-            <a:ext cx="8595360" cy="274320"/>
+            <a:ext cx="7498079" cy="274320"/>
           </a:xfrm>
           <a:prstGeom prst="rect">
             <a:avLst/>
@@ -3784,14 +3932,188 @@
       </p:sp>
       <p:sp>
         <p:nvSpPr>
+          <p:cNvPr id="9" name="Rounded Rectangle 8"/>
+          <p:cNvSpPr/>
+          <p:nvPr/>
+        </p:nvSpPr>
+        <p:spPr>
+          <a:xfrm>
+            <a:off x="8945575" y="6309360"/>
+            <a:ext cx="1481328" cy="310896"/>
+          </a:xfrm>
+          <a:prstGeom prst="roundRect">
+            <a:avLst>
+              <a:gd name="adj" fmla="val 40000"/>
+            </a:avLst>
+          </a:prstGeom>
+          <a:solidFill>
+            <a:srgbClr val="F2F4F8"/>
+          </a:solidFill>
+          <a:ln>
+            <a:noFill/>
+          </a:ln>
+          <a:effectLst/>
+        </p:spPr>
+        <p:style>
+          <a:lnRef idx="1">
+            <a:schemeClr val="accent1"/>
+          </a:lnRef>
+          <a:fillRef idx="3">
+            <a:schemeClr val="accent1"/>
+          </a:fillRef>
+          <a:effectRef idx="2">
+            <a:schemeClr val="accent1"/>
+          </a:effectRef>
+          <a:fontRef idx="minor">
+            <a:schemeClr val="lt1"/>
+          </a:fontRef>
+        </p:style>
+        <p:txBody>
+          <a:bodyPr rtlCol="0" anchor="ctr"/>
+          <a:lstStyle/>
+          <a:p>
+            <a:pPr algn="ctr"/>
+          </a:p>
+        </p:txBody>
+      </p:sp>
+      <p:sp>
+        <p:nvSpPr>
           <p:cNvPr id="10" name="TextBox 9"/>
           <p:cNvSpPr txBox="1"/>
           <p:nvPr/>
         </p:nvSpPr>
         <p:spPr>
           <a:xfrm>
-            <a:off x="11048695" y="6345936"/>
-            <a:ext cx="685800" cy="274320"/>
+            <a:off x="8945575" y="6318504"/>
+            <a:ext cx="1481328" cy="292608"/>
+          </a:xfrm>
+          <a:prstGeom prst="rect">
+            <a:avLst/>
+          </a:prstGeom>
+          <a:noFill/>
+        </p:spPr>
+        <p:txBody>
+          <a:bodyPr wrap="square" anchor="ctr" lIns="54864" rIns="54864" tIns="0" bIns="0">
+            <a:spAutoFit/>
+          </a:bodyPr>
+          <a:lstStyle/>
+          <a:p>
+            <a:pPr algn="ctr">
+              <a:lnSpc>
+                <a:spcPct val="130000"/>
+              </a:lnSpc>
+              <a:defRPr sz="900"/>
+            </a:pPr>
+            <a:r>
+              <a:rPr sz="900" b="1" u="none">
+                <a:solidFill>
+                  <a:srgbClr val="6B7280"/>
+                </a:solidFill>
+                <a:latin typeface="Times New Roman"/>
+                <a:ea typeface="Noto Sans CJK SC"/>
+              </a:rPr>
+              <a:t>核心词汇突破</a:t>
+            </a:r>
+          </a:p>
+        </p:txBody>
+      </p:sp>
+      <p:sp>
+        <p:nvSpPr>
+          <p:cNvPr id="11" name="Rounded Rectangle 10"/>
+          <p:cNvSpPr/>
+          <p:nvPr/>
+        </p:nvSpPr>
+        <p:spPr>
+          <a:xfrm>
+            <a:off x="10536631" y="6309360"/>
+            <a:ext cx="1481328" cy="310896"/>
+          </a:xfrm>
+          <a:prstGeom prst="roundRect">
+            <a:avLst>
+              <a:gd name="adj" fmla="val 40000"/>
+            </a:avLst>
+          </a:prstGeom>
+          <a:solidFill>
+            <a:srgbClr val="F2F4F8"/>
+          </a:solidFill>
+          <a:ln>
+            <a:noFill/>
+          </a:ln>
+          <a:effectLst/>
+        </p:spPr>
+        <p:style>
+          <a:lnRef idx="1">
+            <a:schemeClr val="accent1"/>
+          </a:lnRef>
+          <a:fillRef idx="3">
+            <a:schemeClr val="accent1"/>
+          </a:fillRef>
+          <a:effectRef idx="2">
+            <a:schemeClr val="accent1"/>
+          </a:effectRef>
+          <a:fontRef idx="minor">
+            <a:schemeClr val="lt1"/>
+          </a:fontRef>
+        </p:style>
+        <p:txBody>
+          <a:bodyPr rtlCol="0" anchor="ctr"/>
+          <a:lstStyle/>
+          <a:p>
+            <a:pPr algn="ctr"/>
+          </a:p>
+        </p:txBody>
+      </p:sp>
+      <p:sp>
+        <p:nvSpPr>
+          <p:cNvPr id="12" name="TextBox 11"/>
+          <p:cNvSpPr txBox="1"/>
+          <p:nvPr/>
+        </p:nvSpPr>
+        <p:spPr>
+          <a:xfrm>
+            <a:off x="10536631" y="6318504"/>
+            <a:ext cx="1481328" cy="292608"/>
+          </a:xfrm>
+          <a:prstGeom prst="rect">
+            <a:avLst/>
+          </a:prstGeom>
+          <a:noFill/>
+        </p:spPr>
+        <p:txBody>
+          <a:bodyPr wrap="square" anchor="ctr" lIns="54864" rIns="54864" tIns="0" bIns="0">
+            <a:spAutoFit/>
+          </a:bodyPr>
+          <a:lstStyle/>
+          <a:p>
+            <a:pPr algn="ctr">
+              <a:lnSpc>
+                <a:spcPct val="130000"/>
+              </a:lnSpc>
+              <a:defRPr sz="900"/>
+            </a:pPr>
+            <a:r>
+              <a:rPr sz="900" b="1" u="none">
+                <a:solidFill>
+                  <a:srgbClr val="6B7280"/>
+                </a:solidFill>
+                <a:latin typeface="Times New Roman"/>
+                <a:ea typeface="Noto Sans CJK SC"/>
+              </a:rPr>
+              <a:t>重点句型透视</a:t>
+            </a:r>
+          </a:p>
+        </p:txBody>
+      </p:sp>
+      <p:sp>
+        <p:nvSpPr>
+          <p:cNvPr id="13" name="TextBox 12"/>
+          <p:cNvSpPr txBox="1"/>
+          <p:nvPr/>
+        </p:nvSpPr>
+        <p:spPr>
+          <a:xfrm>
+            <a:off x="11688775" y="6345936"/>
+            <a:ext cx="320040" cy="274320"/>
           </a:xfrm>
           <a:prstGeom prst="rect">
             <a:avLst/>
@@ -3856,7 +4178,7 @@
             <a:avLst/>
           </a:prstGeom>
           <a:solidFill>
-            <a:srgbClr val="F1F3FF"/>
+            <a:srgbClr val="E8F6F7"/>
           </a:solidFill>
           <a:ln>
             <a:noFill/>
@@ -3900,7 +4222,7 @@
             <a:avLst/>
           </a:prstGeom>
           <a:solidFill>
-            <a:srgbClr val="1B2559"/>
+            <a:srgbClr val="0B6E75"/>
           </a:solidFill>
           <a:ln>
             <a:noFill/>
@@ -3944,7 +4266,7 @@
             <a:avLst/>
           </a:prstGeom>
           <a:solidFill>
-            <a:srgbClr val="D6336C"/>
+            <a:srgbClr val="00A5B5"/>
           </a:solidFill>
           <a:ln>
             <a:noFill/>
@@ -3981,7 +4303,7 @@
         </p:nvSpPr>
         <p:spPr>
           <a:xfrm>
-            <a:off x="777240" y="731520"/>
+            <a:off x="777240" y="1005840"/>
             <a:ext cx="10637215" cy="822960"/>
           </a:xfrm>
           <a:prstGeom prst="rect">
@@ -4004,7 +4326,7 @@
             <a:r>
               <a:rPr sz="3800" b="1" u="none">
                 <a:solidFill>
-                  <a:srgbClr val="1B2559"/>
+                  <a:srgbClr val="0B6E75"/>
                 </a:solidFill>
                 <a:latin typeface="Times New Roman"/>
                 <a:ea typeface="Noto Sans CJK SC"/>
@@ -4022,8 +4344,8 @@
         </p:nvSpPr>
         <p:spPr>
           <a:xfrm>
-            <a:off x="868680" y="1783080"/>
-            <a:ext cx="10454335" cy="4251960"/>
+            <a:off x="868680" y="3136392"/>
+            <a:ext cx="10454335" cy="2715768"/>
           </a:xfrm>
           <a:prstGeom prst="rect">
             <a:avLst/>
@@ -4045,7 +4367,7 @@
             <a:r>
               <a:rPr sz="2300" b="0" u="none">
                 <a:solidFill>
-                  <a:srgbClr val="D6336C"/>
+                  <a:srgbClr val="00A5B5"/>
                 </a:solidFill>
                 <a:latin typeface="Times New Roman"/>
                 <a:ea typeface="Noto Sans CJK SC"/>
@@ -4055,7 +4377,7 @@
             <a:r>
               <a:rPr sz="2300" b="0" u="none">
                 <a:solidFill>
-                  <a:srgbClr val="1A1F36"/>
+                  <a:srgbClr val="16323A"/>
                 </a:solidFill>
                 <a:latin typeface="Times New Roman"/>
                 <a:ea typeface="Noto Sans CJK SC"/>
@@ -4075,7 +4397,7 @@
             <a:r>
               <a:rPr sz="2300" b="0" u="none">
                 <a:solidFill>
-                  <a:srgbClr val="D6336C"/>
+                  <a:srgbClr val="00A5B5"/>
                 </a:solidFill>
                 <a:latin typeface="Times New Roman"/>
                 <a:ea typeface="Noto Sans CJK SC"/>
@@ -4085,7 +4407,7 @@
             <a:r>
               <a:rPr sz="2300" b="0" u="none">
                 <a:solidFill>
-                  <a:srgbClr val="1A1F36"/>
+                  <a:srgbClr val="16323A"/>
                 </a:solidFill>
                 <a:latin typeface="Times New Roman"/>
                 <a:ea typeface="Noto Sans CJK SC"/>
@@ -4210,7 +4532,7 @@
             <a:avLst/>
           </a:prstGeom>
           <a:solidFill>
-            <a:srgbClr val="1B2559"/>
+            <a:srgbClr val="FFFFFF"/>
           </a:solidFill>
           <a:ln>
             <a:noFill/>
@@ -4247,14 +4569,14 @@
         </p:nvSpPr>
         <p:spPr>
           <a:xfrm>
-            <a:off x="0" y="6711696"/>
-            <a:ext cx="12191695" cy="146304"/>
+            <a:off x="0" y="0"/>
+            <a:ext cx="12191695" cy="109728"/>
           </a:xfrm>
           <a:prstGeom prst="rect">
             <a:avLst/>
           </a:prstGeom>
           <a:solidFill>
-            <a:srgbClr val="D6336C"/>
+            <a:srgbClr val="0B6E75"/>
           </a:solidFill>
           <a:ln>
             <a:noFill/>
@@ -4285,14 +4607,102 @@
       </p:sp>
       <p:sp>
         <p:nvSpPr>
-          <p:cNvPr id="4" name="TextBox 3"/>
+          <p:cNvPr id="4" name="Rectangle 3"/>
+          <p:cNvSpPr/>
+          <p:nvPr/>
+        </p:nvSpPr>
+        <p:spPr>
+          <a:xfrm>
+            <a:off x="0" y="6748272"/>
+            <a:ext cx="12191695" cy="109728"/>
+          </a:xfrm>
+          <a:prstGeom prst="rect">
+            <a:avLst/>
+          </a:prstGeom>
+          <a:solidFill>
+            <a:srgbClr val="00A5B5"/>
+          </a:solidFill>
+          <a:ln>
+            <a:noFill/>
+          </a:ln>
+          <a:effectLst/>
+        </p:spPr>
+        <p:style>
+          <a:lnRef idx="1">
+            <a:schemeClr val="accent1"/>
+          </a:lnRef>
+          <a:fillRef idx="3">
+            <a:schemeClr val="accent1"/>
+          </a:fillRef>
+          <a:effectRef idx="2">
+            <a:schemeClr val="accent1"/>
+          </a:effectRef>
+          <a:fontRef idx="minor">
+            <a:schemeClr val="lt1"/>
+          </a:fontRef>
+        </p:style>
+        <p:txBody>
+          <a:bodyPr rtlCol="0" anchor="ctr"/>
+          <a:lstStyle/>
+          <a:p>
+            <a:pPr algn="ctr"/>
+          </a:p>
+        </p:txBody>
+      </p:sp>
+      <p:sp>
+        <p:nvSpPr>
+          <p:cNvPr id="5" name="Rectangle 4"/>
+          <p:cNvSpPr/>
+          <p:nvPr/>
+        </p:nvSpPr>
+        <p:spPr>
+          <a:xfrm>
+            <a:off x="777240" y="2331720"/>
+            <a:ext cx="128016" cy="1371600"/>
+          </a:xfrm>
+          <a:prstGeom prst="rect">
+            <a:avLst/>
+          </a:prstGeom>
+          <a:solidFill>
+            <a:srgbClr val="00A5B5"/>
+          </a:solidFill>
+          <a:ln>
+            <a:noFill/>
+          </a:ln>
+          <a:effectLst/>
+        </p:spPr>
+        <p:style>
+          <a:lnRef idx="1">
+            <a:schemeClr val="accent1"/>
+          </a:lnRef>
+          <a:fillRef idx="3">
+            <a:schemeClr val="accent1"/>
+          </a:fillRef>
+          <a:effectRef idx="2">
+            <a:schemeClr val="accent1"/>
+          </a:effectRef>
+          <a:fontRef idx="minor">
+            <a:schemeClr val="lt1"/>
+          </a:fontRef>
+        </p:style>
+        <p:txBody>
+          <a:bodyPr rtlCol="0" anchor="ctr"/>
+          <a:lstStyle/>
+          <a:p>
+            <a:pPr algn="ctr"/>
+          </a:p>
+        </p:txBody>
+      </p:sp>
+      <p:sp>
+        <p:nvSpPr>
+          <p:cNvPr id="6" name="TextBox 5"/>
           <p:cNvSpPr txBox="1"/>
           <p:nvPr/>
         </p:nvSpPr>
         <p:spPr>
           <a:xfrm>
-            <a:off x="777240" y="1188720"/>
-            <a:ext cx="3657600" cy="1554480"/>
+            <a:off x="1143000" y="1234440"/>
+            <a:ext cx="3657600" cy="1463040"/>
           </a:xfrm>
           <a:prstGeom prst="rect">
             <a:avLst/>
@@ -4309,12 +4719,12 @@
               <a:lnSpc>
                 <a:spcPct val="130000"/>
               </a:lnSpc>
-              <a:defRPr sz="9200"/>
+              <a:defRPr sz="8800"/>
             </a:pPr>
             <a:r>
-              <a:rPr sz="9200" b="1" u="none">
-                <a:solidFill>
-                  <a:srgbClr val="D6336C"/>
+              <a:rPr sz="8800" b="1" u="none">
+                <a:solidFill>
+                  <a:srgbClr val="E8F6F7"/>
                 </a:solidFill>
                 <a:latin typeface="Times New Roman"/>
                 <a:ea typeface="Noto Sans CJK SC"/>
@@ -4326,14 +4736,14 @@
       </p:sp>
       <p:sp>
         <p:nvSpPr>
-          <p:cNvPr id="5" name="TextBox 4"/>
+          <p:cNvPr id="7" name="TextBox 6"/>
           <p:cNvSpPr txBox="1"/>
           <p:nvPr/>
         </p:nvSpPr>
         <p:spPr>
           <a:xfrm>
-            <a:off x="841248" y="2834640"/>
-            <a:ext cx="10180015" cy="1097280"/>
+            <a:off x="1143000" y="2377440"/>
+            <a:ext cx="9905695" cy="1005840"/>
           </a:xfrm>
           <a:prstGeom prst="rect">
             <a:avLst/>
@@ -4355,7 +4765,7 @@
             <a:r>
               <a:rPr sz="4000" b="1" u="none">
                 <a:solidFill>
-                  <a:srgbClr val="FFFFFF"/>
+                  <a:srgbClr val="0B6E75"/>
                 </a:solidFill>
                 <a:latin typeface="Times New Roman"/>
                 <a:ea typeface="Noto Sans CJK SC"/>
@@ -4367,14 +4777,14 @@
       </p:sp>
       <p:sp>
         <p:nvSpPr>
-          <p:cNvPr id="6" name="Rounded Rectangle 5"/>
+          <p:cNvPr id="8" name="Rounded Rectangle 7"/>
           <p:cNvSpPr/>
           <p:nvPr/>
         </p:nvSpPr>
         <p:spPr>
           <a:xfrm>
-            <a:off x="11688775" y="2011680"/>
-            <a:ext cx="365760" cy="2377440"/>
+            <a:off x="777240" y="2011680"/>
+            <a:ext cx="384048" cy="868680"/>
           </a:xfrm>
           <a:prstGeom prst="roundRect">
             <a:avLst>
@@ -4382,7 +4792,7 @@
             </a:avLst>
           </a:prstGeom>
           <a:solidFill>
-            <a:srgbClr val="D6336C"/>
+            <a:srgbClr val="00A5B5"/>
           </a:solidFill>
           <a:ln>
             <a:noFill/>
@@ -4413,14 +4823,14 @@
       </p:sp>
       <p:sp>
         <p:nvSpPr>
-          <p:cNvPr id="7" name="TextBox 6"/>
+          <p:cNvPr id="9" name="TextBox 8"/>
           <p:cNvSpPr txBox="1"/>
           <p:nvPr/>
         </p:nvSpPr>
         <p:spPr>
           <a:xfrm>
-            <a:off x="11688775" y="2103120"/>
-            <a:ext cx="365760" cy="2194560"/>
+            <a:off x="1280160" y="2011680"/>
+            <a:ext cx="2011680" cy="384048"/>
           </a:xfrm>
           <a:prstGeom prst="rect">
             <a:avLst/>
@@ -4428,12 +4838,12 @@
           <a:noFill/>
         </p:spPr>
         <p:txBody>
-          <a:bodyPr wrap="square" anchor="ctr" lIns="54864" rIns="54864" tIns="0" bIns="0" vert="eaVert">
+          <a:bodyPr wrap="square" anchor="t" lIns="54864" rIns="54864" tIns="0" bIns="0">
             <a:spAutoFit/>
           </a:bodyPr>
           <a:lstStyle/>
           <a:p>
-            <a:pPr algn="ctr">
+            <a:pPr algn="l">
               <a:lnSpc>
                 <a:spcPct val="130000"/>
               </a:lnSpc>
@@ -4442,7 +4852,7 @@
             <a:r>
               <a:rPr sz="1500" b="1" u="none">
                 <a:solidFill>
-                  <a:srgbClr val="FFFFFF"/>
+                  <a:srgbClr val="00A5B5"/>
                 </a:solidFill>
                 <a:latin typeface="Times New Roman"/>
                 <a:ea typeface="Noto Sans CJK SC"/>
@@ -4472,20 +4882,20 @@
       <p:grpSpPr/>
       <p:sp>
         <p:nvSpPr>
-          <p:cNvPr id="2" name="Rectangle 1"/>
+          <p:cNvPr id="2" name="Rounded Rectangle 1"/>
           <p:cNvSpPr/>
           <p:nvPr/>
         </p:nvSpPr>
         <p:spPr>
           <a:xfrm>
-            <a:off x="0" y="0"/>
-            <a:ext cx="201168" cy="6858000"/>
-          </a:xfrm>
-          <a:prstGeom prst="rect">
+            <a:off x="10042855" y="256032"/>
+            <a:ext cx="960120" cy="182880"/>
+          </a:xfrm>
+          <a:prstGeom prst="roundRect">
             <a:avLst/>
           </a:prstGeom>
           <a:solidFill>
-            <a:srgbClr val="E6E9FB"/>
+            <a:srgbClr val="BFE8EA"/>
           </a:solidFill>
           <a:ln>
             <a:noFill/>
@@ -4516,20 +4926,20 @@
       </p:sp>
       <p:sp>
         <p:nvSpPr>
-          <p:cNvPr id="3" name="Rectangle 2"/>
+          <p:cNvPr id="3" name="Rounded Rectangle 2"/>
           <p:cNvSpPr/>
           <p:nvPr/>
         </p:nvSpPr>
         <p:spPr>
           <a:xfrm>
-            <a:off x="0" y="0"/>
-            <a:ext cx="7558850" cy="91440"/>
-          </a:xfrm>
-          <a:prstGeom prst="rect">
+            <a:off x="11140135" y="713232"/>
+            <a:ext cx="658368" cy="182880"/>
+          </a:xfrm>
+          <a:prstGeom prst="roundRect">
             <a:avLst/>
           </a:prstGeom>
           <a:solidFill>
-            <a:srgbClr val="1B2559"/>
+            <a:srgbClr val="FBF3C4"/>
           </a:solidFill>
           <a:ln>
             <a:noFill/>
@@ -4560,20 +4970,22 @@
       </p:sp>
       <p:sp>
         <p:nvSpPr>
-          <p:cNvPr id="4" name="Rectangle 3"/>
+          <p:cNvPr id="4" name="Rounded Rectangle 3"/>
           <p:cNvSpPr/>
           <p:nvPr/>
         </p:nvSpPr>
         <p:spPr>
           <a:xfrm>
-            <a:off x="7558850" y="0"/>
-            <a:ext cx="4632844" cy="91440"/>
-          </a:xfrm>
-          <a:prstGeom prst="rect">
-            <a:avLst/>
+            <a:off x="548640" y="365760"/>
+            <a:ext cx="2249424" cy="566928"/>
+          </a:xfrm>
+          <a:prstGeom prst="roundRect">
+            <a:avLst>
+              <a:gd name="adj" fmla="val 12000"/>
+            </a:avLst>
           </a:prstGeom>
           <a:solidFill>
-            <a:srgbClr val="D6336C"/>
+            <a:srgbClr val="00A5B5"/>
           </a:solidFill>
           <a:ln>
             <a:noFill/>
@@ -4611,7 +5023,7 @@
         <p:spPr>
           <a:xfrm>
             <a:off x="548640" y="384048"/>
-            <a:ext cx="9265615" cy="640080"/>
+            <a:ext cx="2249424" cy="530352"/>
           </a:xfrm>
           <a:prstGeom prst="rect">
             <a:avLst/>
@@ -4624,21 +5036,21 @@
           </a:bodyPr>
           <a:lstStyle/>
           <a:p>
-            <a:pPr algn="l">
+            <a:pPr algn="ctr">
               <a:lnSpc>
                 <a:spcPct val="130000"/>
               </a:lnSpc>
-              <a:defRPr sz="2800"/>
+              <a:defRPr sz="2300"/>
             </a:pPr>
             <a:r>
-              <a:rPr sz="2800" b="1" u="none">
-                <a:solidFill>
-                  <a:srgbClr val="1B2559"/>
+              <a:rPr sz="2300" b="1" u="none">
+                <a:solidFill>
+                  <a:srgbClr val="FFFFFF"/>
                 </a:solidFill>
                 <a:latin typeface="Times New Roman"/>
                 <a:ea typeface="Noto Sans CJK SC"/>
               </a:rPr>
-              <a:t>学习目标</a:t>
+              <a:t>【学习目标】</a:t>
             </a:r>
           </a:p>
         </p:txBody>
@@ -4674,7 +5086,7 @@
             <a:r>
               <a:rPr sz="2600" b="0" u="none">
                 <a:solidFill>
-                  <a:srgbClr val="D6336C"/>
+                  <a:srgbClr val="00A5B5"/>
                 </a:solidFill>
                 <a:latin typeface="Times New Roman"/>
                 <a:ea typeface="Noto Sans CJK SC"/>
@@ -4684,7 +5096,7 @@
             <a:r>
               <a:rPr sz="2600" b="0" u="none">
                 <a:solidFill>
-                  <a:srgbClr val="1A1F36"/>
+                  <a:srgbClr val="16323A"/>
                 </a:solidFill>
                 <a:latin typeface="Times New Roman"/>
                 <a:ea typeface="Noto Sans CJK SC"/>
@@ -4704,7 +5116,7 @@
             <a:r>
               <a:rPr sz="2600" b="0" u="none">
                 <a:solidFill>
-                  <a:srgbClr val="D6336C"/>
+                  <a:srgbClr val="00A5B5"/>
                 </a:solidFill>
                 <a:latin typeface="Times New Roman"/>
                 <a:ea typeface="Noto Sans CJK SC"/>
@@ -4714,7 +5126,7 @@
             <a:r>
               <a:rPr sz="2600" b="0" u="none">
                 <a:solidFill>
-                  <a:srgbClr val="1A1F36"/>
+                  <a:srgbClr val="16323A"/>
                 </a:solidFill>
                 <a:latin typeface="Times New Roman"/>
                 <a:ea typeface="Noto Sans CJK SC"/>
@@ -4739,7 +5151,7 @@
             <a:avLst/>
           </a:prstGeom>
           <a:solidFill>
-            <a:srgbClr val="D6336C"/>
+            <a:srgbClr val="00A5B5"/>
           </a:solidFill>
           <a:ln>
             <a:noFill/>
@@ -4777,7 +5189,7 @@
         <p:spPr>
           <a:xfrm>
             <a:off x="548640" y="6345936"/>
-            <a:ext cx="8595360" cy="274320"/>
+            <a:ext cx="7498079" cy="274320"/>
           </a:xfrm>
           <a:prstGeom prst="rect">
             <a:avLst/>
@@ -4811,14 +5223,188 @@
       </p:sp>
       <p:sp>
         <p:nvSpPr>
-          <p:cNvPr id="9" name="TextBox 8"/>
+          <p:cNvPr id="9" name="Rounded Rectangle 8"/>
+          <p:cNvSpPr/>
+          <p:nvPr/>
+        </p:nvSpPr>
+        <p:spPr>
+          <a:xfrm>
+            <a:off x="8945575" y="6309360"/>
+            <a:ext cx="1481328" cy="310896"/>
+          </a:xfrm>
+          <a:prstGeom prst="roundRect">
+            <a:avLst>
+              <a:gd name="adj" fmla="val 40000"/>
+            </a:avLst>
+          </a:prstGeom>
+          <a:solidFill>
+            <a:srgbClr val="F2F4F8"/>
+          </a:solidFill>
+          <a:ln>
+            <a:noFill/>
+          </a:ln>
+          <a:effectLst/>
+        </p:spPr>
+        <p:style>
+          <a:lnRef idx="1">
+            <a:schemeClr val="accent1"/>
+          </a:lnRef>
+          <a:fillRef idx="3">
+            <a:schemeClr val="accent1"/>
+          </a:fillRef>
+          <a:effectRef idx="2">
+            <a:schemeClr val="accent1"/>
+          </a:effectRef>
+          <a:fontRef idx="minor">
+            <a:schemeClr val="lt1"/>
+          </a:fontRef>
+        </p:style>
+        <p:txBody>
+          <a:bodyPr rtlCol="0" anchor="ctr"/>
+          <a:lstStyle/>
+          <a:p>
+            <a:pPr algn="ctr"/>
+          </a:p>
+        </p:txBody>
+      </p:sp>
+      <p:sp>
+        <p:nvSpPr>
+          <p:cNvPr id="10" name="TextBox 9"/>
           <p:cNvSpPr txBox="1"/>
           <p:nvPr/>
         </p:nvSpPr>
         <p:spPr>
           <a:xfrm>
-            <a:off x="11048695" y="6345936"/>
-            <a:ext cx="685800" cy="274320"/>
+            <a:off x="8945575" y="6318504"/>
+            <a:ext cx="1481328" cy="292608"/>
+          </a:xfrm>
+          <a:prstGeom prst="rect">
+            <a:avLst/>
+          </a:prstGeom>
+          <a:noFill/>
+        </p:spPr>
+        <p:txBody>
+          <a:bodyPr wrap="square" anchor="ctr" lIns="54864" rIns="54864" tIns="0" bIns="0">
+            <a:spAutoFit/>
+          </a:bodyPr>
+          <a:lstStyle/>
+          <a:p>
+            <a:pPr algn="ctr">
+              <a:lnSpc>
+                <a:spcPct val="130000"/>
+              </a:lnSpc>
+              <a:defRPr sz="900"/>
+            </a:pPr>
+            <a:r>
+              <a:rPr sz="900" b="1" u="none">
+                <a:solidFill>
+                  <a:srgbClr val="6B7280"/>
+                </a:solidFill>
+                <a:latin typeface="Times New Roman"/>
+                <a:ea typeface="Noto Sans CJK SC"/>
+              </a:rPr>
+              <a:t>核心词汇突破</a:t>
+            </a:r>
+          </a:p>
+        </p:txBody>
+      </p:sp>
+      <p:sp>
+        <p:nvSpPr>
+          <p:cNvPr id="11" name="Rounded Rectangle 10"/>
+          <p:cNvSpPr/>
+          <p:nvPr/>
+        </p:nvSpPr>
+        <p:spPr>
+          <a:xfrm>
+            <a:off x="10536631" y="6309360"/>
+            <a:ext cx="1481328" cy="310896"/>
+          </a:xfrm>
+          <a:prstGeom prst="roundRect">
+            <a:avLst>
+              <a:gd name="adj" fmla="val 40000"/>
+            </a:avLst>
+          </a:prstGeom>
+          <a:solidFill>
+            <a:srgbClr val="F2F4F8"/>
+          </a:solidFill>
+          <a:ln>
+            <a:noFill/>
+          </a:ln>
+          <a:effectLst/>
+        </p:spPr>
+        <p:style>
+          <a:lnRef idx="1">
+            <a:schemeClr val="accent1"/>
+          </a:lnRef>
+          <a:fillRef idx="3">
+            <a:schemeClr val="accent1"/>
+          </a:fillRef>
+          <a:effectRef idx="2">
+            <a:schemeClr val="accent1"/>
+          </a:effectRef>
+          <a:fontRef idx="minor">
+            <a:schemeClr val="lt1"/>
+          </a:fontRef>
+        </p:style>
+        <p:txBody>
+          <a:bodyPr rtlCol="0" anchor="ctr"/>
+          <a:lstStyle/>
+          <a:p>
+            <a:pPr algn="ctr"/>
+          </a:p>
+        </p:txBody>
+      </p:sp>
+      <p:sp>
+        <p:nvSpPr>
+          <p:cNvPr id="12" name="TextBox 11"/>
+          <p:cNvSpPr txBox="1"/>
+          <p:nvPr/>
+        </p:nvSpPr>
+        <p:spPr>
+          <a:xfrm>
+            <a:off x="10536631" y="6318504"/>
+            <a:ext cx="1481328" cy="292608"/>
+          </a:xfrm>
+          <a:prstGeom prst="rect">
+            <a:avLst/>
+          </a:prstGeom>
+          <a:noFill/>
+        </p:spPr>
+        <p:txBody>
+          <a:bodyPr wrap="square" anchor="ctr" lIns="54864" rIns="54864" tIns="0" bIns="0">
+            <a:spAutoFit/>
+          </a:bodyPr>
+          <a:lstStyle/>
+          <a:p>
+            <a:pPr algn="ctr">
+              <a:lnSpc>
+                <a:spcPct val="130000"/>
+              </a:lnSpc>
+              <a:defRPr sz="900"/>
+            </a:pPr>
+            <a:r>
+              <a:rPr sz="900" b="1" u="none">
+                <a:solidFill>
+                  <a:srgbClr val="6B7280"/>
+                </a:solidFill>
+                <a:latin typeface="Times New Roman"/>
+                <a:ea typeface="Noto Sans CJK SC"/>
+              </a:rPr>
+              <a:t>重点句型透视</a:t>
+            </a:r>
+          </a:p>
+        </p:txBody>
+      </p:sp>
+      <p:sp>
+        <p:nvSpPr>
+          <p:cNvPr id="13" name="TextBox 12"/>
+          <p:cNvSpPr txBox="1"/>
+          <p:nvPr/>
+        </p:nvSpPr>
+        <p:spPr>
+          <a:xfrm>
+            <a:off x="11688775" y="6345936"/>
+            <a:ext cx="320040" cy="274320"/>
           </a:xfrm>
           <a:prstGeom prst="rect">
             <a:avLst/>
@@ -4870,20 +5456,20 @@
       <p:grpSpPr/>
       <p:sp>
         <p:nvSpPr>
-          <p:cNvPr id="2" name="Rectangle 1"/>
+          <p:cNvPr id="2" name="Rounded Rectangle 1"/>
           <p:cNvSpPr/>
           <p:nvPr/>
         </p:nvSpPr>
         <p:spPr>
           <a:xfrm>
-            <a:off x="0" y="0"/>
-            <a:ext cx="201168" cy="6858000"/>
-          </a:xfrm>
-          <a:prstGeom prst="rect">
+            <a:off x="10042855" y="256032"/>
+            <a:ext cx="960120" cy="182880"/>
+          </a:xfrm>
+          <a:prstGeom prst="roundRect">
             <a:avLst/>
           </a:prstGeom>
           <a:solidFill>
-            <a:srgbClr val="E6E9FB"/>
+            <a:srgbClr val="BFE8EA"/>
           </a:solidFill>
           <a:ln>
             <a:noFill/>
@@ -4914,20 +5500,20 @@
       </p:sp>
       <p:sp>
         <p:nvSpPr>
-          <p:cNvPr id="3" name="Rectangle 2"/>
+          <p:cNvPr id="3" name="Rounded Rectangle 2"/>
           <p:cNvSpPr/>
           <p:nvPr/>
         </p:nvSpPr>
         <p:spPr>
           <a:xfrm>
-            <a:off x="0" y="0"/>
-            <a:ext cx="7558850" cy="91440"/>
-          </a:xfrm>
-          <a:prstGeom prst="rect">
+            <a:off x="11140135" y="713232"/>
+            <a:ext cx="658368" cy="182880"/>
+          </a:xfrm>
+          <a:prstGeom prst="roundRect">
             <a:avLst/>
           </a:prstGeom>
           <a:solidFill>
-            <a:srgbClr val="1B2559"/>
+            <a:srgbClr val="FBF3C4"/>
           </a:solidFill>
           <a:ln>
             <a:noFill/>
@@ -4958,20 +5544,22 @@
       </p:sp>
       <p:sp>
         <p:nvSpPr>
-          <p:cNvPr id="4" name="Rectangle 3"/>
+          <p:cNvPr id="4" name="Rounded Rectangle 3"/>
           <p:cNvSpPr/>
           <p:nvPr/>
         </p:nvSpPr>
         <p:spPr>
           <a:xfrm>
-            <a:off x="7558850" y="0"/>
-            <a:ext cx="4632844" cy="91440"/>
-          </a:xfrm>
-          <a:prstGeom prst="rect">
-            <a:avLst/>
+            <a:off x="548640" y="365760"/>
+            <a:ext cx="6291072" cy="566928"/>
+          </a:xfrm>
+          <a:prstGeom prst="roundRect">
+            <a:avLst>
+              <a:gd name="adj" fmla="val 12000"/>
+            </a:avLst>
           </a:prstGeom>
           <a:solidFill>
-            <a:srgbClr val="D6336C"/>
+            <a:srgbClr val="00A5B5"/>
           </a:solidFill>
           <a:ln>
             <a:noFill/>
@@ -5009,7 +5597,7 @@
         <p:spPr>
           <a:xfrm>
             <a:off x="548640" y="384048"/>
-            <a:ext cx="9265615" cy="640080"/>
+            <a:ext cx="6291072" cy="530352"/>
           </a:xfrm>
           <a:prstGeom prst="rect">
             <a:avLst/>
@@ -5022,21 +5610,21 @@
           </a:bodyPr>
           <a:lstStyle/>
           <a:p>
-            <a:pPr algn="l">
+            <a:pPr algn="ctr">
               <a:lnSpc>
                 <a:spcPct val="130000"/>
               </a:lnSpc>
-              <a:defRPr sz="2800"/>
+              <a:defRPr sz="2300"/>
             </a:pPr>
             <a:r>
-              <a:rPr sz="2800" b="1" u="none">
-                <a:solidFill>
-                  <a:srgbClr val="1B2559"/>
+              <a:rPr sz="2300" b="1" u="none">
+                <a:solidFill>
+                  <a:srgbClr val="FFFFFF"/>
                 </a:solidFill>
                 <a:latin typeface="Times New Roman"/>
                 <a:ea typeface="Noto Sans CJK SC"/>
               </a:rPr>
-              <a:t>一、单词拼写（每空1分，共10分）</a:t>
+              <a:t>【一、单词拼写（每空1分，共10分）】</a:t>
             </a:r>
           </a:p>
         </p:txBody>
@@ -5044,47 +5632,6 @@
       <p:sp>
         <p:nvSpPr>
           <p:cNvPr id="6" name="TextBox 5"/>
-          <p:cNvSpPr txBox="1"/>
-          <p:nvPr/>
-        </p:nvSpPr>
-        <p:spPr>
-          <a:xfrm>
-            <a:off x="9082735" y="457200"/>
-            <a:ext cx="2606040" cy="457200"/>
-          </a:xfrm>
-          <a:prstGeom prst="rect">
-            <a:avLst/>
-          </a:prstGeom>
-          <a:noFill/>
-        </p:spPr>
-        <p:txBody>
-          <a:bodyPr wrap="square" anchor="t" lIns="54864" rIns="54864" tIns="0" bIns="0">
-            <a:spAutoFit/>
-          </a:bodyPr>
-          <a:lstStyle/>
-          <a:p>
-            <a:pPr algn="r">
-              <a:lnSpc>
-                <a:spcPct val="130000"/>
-              </a:lnSpc>
-              <a:defRPr sz="1200"/>
-            </a:pPr>
-            <a:r>
-              <a:rPr sz="1200" b="1" u="none">
-                <a:solidFill>
-                  <a:srgbClr val="D6336C"/>
-                </a:solidFill>
-                <a:latin typeface="Times New Roman"/>
-                <a:ea typeface="Noto Sans CJK SC"/>
-              </a:rPr>
-              <a:t>一、单词拼写（每空1</a:t>
-            </a:r>
-          </a:p>
-        </p:txBody>
-      </p:sp>
-      <p:sp>
-        <p:nvSpPr>
-          <p:cNvPr id="7" name="TextBox 6"/>
           <p:cNvSpPr txBox="1"/>
           <p:nvPr/>
         </p:nvSpPr>
@@ -5113,7 +5660,7 @@
             <a:r>
               <a:rPr sz="2200" b="0" u="none">
                 <a:solidFill>
-                  <a:srgbClr val="1A1F36"/>
+                  <a:srgbClr val="16323A"/>
                 </a:solidFill>
                 <a:latin typeface="Times New Roman"/>
                 <a:ea typeface="Noto Sans CJK SC"/>
@@ -5133,7 +5680,7 @@
             <a:r>
               <a:rPr sz="2200" b="0" u="none">
                 <a:solidFill>
-                  <a:srgbClr val="1A1F36"/>
+                  <a:srgbClr val="16323A"/>
                 </a:solidFill>
                 <a:latin typeface="Times New Roman"/>
                 <a:ea typeface="Noto Sans CJK SC"/>
@@ -5153,7 +5700,7 @@
             <a:r>
               <a:rPr sz="2200" b="0" u="none">
                 <a:solidFill>
-                  <a:srgbClr val="1A1F36"/>
+                  <a:srgbClr val="16323A"/>
                 </a:solidFill>
                 <a:latin typeface="Times New Roman"/>
                 <a:ea typeface="Noto Sans CJK SC"/>
@@ -5173,7 +5720,7 @@
             <a:r>
               <a:rPr sz="2200" b="0" u="none">
                 <a:solidFill>
-                  <a:srgbClr val="1A1F36"/>
+                  <a:srgbClr val="16323A"/>
                 </a:solidFill>
                 <a:latin typeface="Times New Roman"/>
                 <a:ea typeface="Noto Sans CJK SC"/>
@@ -5193,7 +5740,7 @@
             <a:r>
               <a:rPr sz="2200" b="0" u="none">
                 <a:solidFill>
-                  <a:srgbClr val="1A1F36"/>
+                  <a:srgbClr val="16323A"/>
                 </a:solidFill>
                 <a:latin typeface="Times New Roman"/>
                 <a:ea typeface="Noto Sans CJK SC"/>
@@ -5205,7 +5752,7 @@
       </p:sp>
       <p:sp>
         <p:nvSpPr>
-          <p:cNvPr id="8" name="Rectangle 7"/>
+          <p:cNvPr id="7" name="Rectangle 6"/>
           <p:cNvSpPr/>
           <p:nvPr/>
         </p:nvSpPr>
@@ -5218,7 +5765,7 @@
             <a:avLst/>
           </a:prstGeom>
           <a:solidFill>
-            <a:srgbClr val="D6336C"/>
+            <a:srgbClr val="00A5B5"/>
           </a:solidFill>
           <a:ln>
             <a:noFill/>
@@ -5249,14 +5796,14 @@
       </p:sp>
       <p:sp>
         <p:nvSpPr>
-          <p:cNvPr id="9" name="TextBox 8"/>
+          <p:cNvPr id="8" name="TextBox 7"/>
           <p:cNvSpPr txBox="1"/>
           <p:nvPr/>
         </p:nvSpPr>
         <p:spPr>
           <a:xfrm>
             <a:off x="548640" y="6345936"/>
-            <a:ext cx="8595360" cy="274320"/>
+            <a:ext cx="7498079" cy="274320"/>
           </a:xfrm>
           <a:prstGeom prst="rect">
             <a:avLst/>
@@ -5290,14 +5837,188 @@
       </p:sp>
       <p:sp>
         <p:nvSpPr>
+          <p:cNvPr id="9" name="Rounded Rectangle 8"/>
+          <p:cNvSpPr/>
+          <p:nvPr/>
+        </p:nvSpPr>
+        <p:spPr>
+          <a:xfrm>
+            <a:off x="8945575" y="6309360"/>
+            <a:ext cx="1481328" cy="310896"/>
+          </a:xfrm>
+          <a:prstGeom prst="roundRect">
+            <a:avLst>
+              <a:gd name="adj" fmla="val 40000"/>
+            </a:avLst>
+          </a:prstGeom>
+          <a:solidFill>
+            <a:srgbClr val="F2F4F8"/>
+          </a:solidFill>
+          <a:ln>
+            <a:noFill/>
+          </a:ln>
+          <a:effectLst/>
+        </p:spPr>
+        <p:style>
+          <a:lnRef idx="1">
+            <a:schemeClr val="accent1"/>
+          </a:lnRef>
+          <a:fillRef idx="3">
+            <a:schemeClr val="accent1"/>
+          </a:fillRef>
+          <a:effectRef idx="2">
+            <a:schemeClr val="accent1"/>
+          </a:effectRef>
+          <a:fontRef idx="minor">
+            <a:schemeClr val="lt1"/>
+          </a:fontRef>
+        </p:style>
+        <p:txBody>
+          <a:bodyPr rtlCol="0" anchor="ctr"/>
+          <a:lstStyle/>
+          <a:p>
+            <a:pPr algn="ctr"/>
+          </a:p>
+        </p:txBody>
+      </p:sp>
+      <p:sp>
+        <p:nvSpPr>
           <p:cNvPr id="10" name="TextBox 9"/>
           <p:cNvSpPr txBox="1"/>
           <p:nvPr/>
         </p:nvSpPr>
         <p:spPr>
           <a:xfrm>
-            <a:off x="11048695" y="6345936"/>
-            <a:ext cx="685800" cy="274320"/>
+            <a:off x="8945575" y="6318504"/>
+            <a:ext cx="1481328" cy="292608"/>
+          </a:xfrm>
+          <a:prstGeom prst="rect">
+            <a:avLst/>
+          </a:prstGeom>
+          <a:noFill/>
+        </p:spPr>
+        <p:txBody>
+          <a:bodyPr wrap="square" anchor="ctr" lIns="54864" rIns="54864" tIns="0" bIns="0">
+            <a:spAutoFit/>
+          </a:bodyPr>
+          <a:lstStyle/>
+          <a:p>
+            <a:pPr algn="ctr">
+              <a:lnSpc>
+                <a:spcPct val="130000"/>
+              </a:lnSpc>
+              <a:defRPr sz="900"/>
+            </a:pPr>
+            <a:r>
+              <a:rPr sz="900" b="1" u="none">
+                <a:solidFill>
+                  <a:srgbClr val="6B7280"/>
+                </a:solidFill>
+                <a:latin typeface="Times New Roman"/>
+                <a:ea typeface="Noto Sans CJK SC"/>
+              </a:rPr>
+              <a:t>核心词汇突破</a:t>
+            </a:r>
+          </a:p>
+        </p:txBody>
+      </p:sp>
+      <p:sp>
+        <p:nvSpPr>
+          <p:cNvPr id="11" name="Rounded Rectangle 10"/>
+          <p:cNvSpPr/>
+          <p:nvPr/>
+        </p:nvSpPr>
+        <p:spPr>
+          <a:xfrm>
+            <a:off x="10536631" y="6309360"/>
+            <a:ext cx="1481328" cy="310896"/>
+          </a:xfrm>
+          <a:prstGeom prst="roundRect">
+            <a:avLst>
+              <a:gd name="adj" fmla="val 40000"/>
+            </a:avLst>
+          </a:prstGeom>
+          <a:solidFill>
+            <a:srgbClr val="F2F4F8"/>
+          </a:solidFill>
+          <a:ln>
+            <a:noFill/>
+          </a:ln>
+          <a:effectLst/>
+        </p:spPr>
+        <p:style>
+          <a:lnRef idx="1">
+            <a:schemeClr val="accent1"/>
+          </a:lnRef>
+          <a:fillRef idx="3">
+            <a:schemeClr val="accent1"/>
+          </a:fillRef>
+          <a:effectRef idx="2">
+            <a:schemeClr val="accent1"/>
+          </a:effectRef>
+          <a:fontRef idx="minor">
+            <a:schemeClr val="lt1"/>
+          </a:fontRef>
+        </p:style>
+        <p:txBody>
+          <a:bodyPr rtlCol="0" anchor="ctr"/>
+          <a:lstStyle/>
+          <a:p>
+            <a:pPr algn="ctr"/>
+          </a:p>
+        </p:txBody>
+      </p:sp>
+      <p:sp>
+        <p:nvSpPr>
+          <p:cNvPr id="12" name="TextBox 11"/>
+          <p:cNvSpPr txBox="1"/>
+          <p:nvPr/>
+        </p:nvSpPr>
+        <p:spPr>
+          <a:xfrm>
+            <a:off x="10536631" y="6318504"/>
+            <a:ext cx="1481328" cy="292608"/>
+          </a:xfrm>
+          <a:prstGeom prst="rect">
+            <a:avLst/>
+          </a:prstGeom>
+          <a:noFill/>
+        </p:spPr>
+        <p:txBody>
+          <a:bodyPr wrap="square" anchor="ctr" lIns="54864" rIns="54864" tIns="0" bIns="0">
+            <a:spAutoFit/>
+          </a:bodyPr>
+          <a:lstStyle/>
+          <a:p>
+            <a:pPr algn="ctr">
+              <a:lnSpc>
+                <a:spcPct val="130000"/>
+              </a:lnSpc>
+              <a:defRPr sz="900"/>
+            </a:pPr>
+            <a:r>
+              <a:rPr sz="900" b="1" u="none">
+                <a:solidFill>
+                  <a:srgbClr val="6B7280"/>
+                </a:solidFill>
+                <a:latin typeface="Times New Roman"/>
+                <a:ea typeface="Noto Sans CJK SC"/>
+              </a:rPr>
+              <a:t>重点句型透视</a:t>
+            </a:r>
+          </a:p>
+        </p:txBody>
+      </p:sp>
+      <p:sp>
+        <p:nvSpPr>
+          <p:cNvPr id="13" name="TextBox 12"/>
+          <p:cNvSpPr txBox="1"/>
+          <p:nvPr/>
+        </p:nvSpPr>
+        <p:spPr>
+          <a:xfrm>
+            <a:off x="11688775" y="6345936"/>
+            <a:ext cx="320040" cy="274320"/>
           </a:xfrm>
           <a:prstGeom prst="rect">
             <a:avLst/>
@@ -5349,20 +6070,20 @@
       <p:grpSpPr/>
       <p:sp>
         <p:nvSpPr>
-          <p:cNvPr id="2" name="Rectangle 1"/>
+          <p:cNvPr id="2" name="Rounded Rectangle 1"/>
           <p:cNvSpPr/>
           <p:nvPr/>
         </p:nvSpPr>
         <p:spPr>
           <a:xfrm>
-            <a:off x="0" y="0"/>
-            <a:ext cx="201168" cy="6858000"/>
-          </a:xfrm>
-          <a:prstGeom prst="rect">
+            <a:off x="10042855" y="256032"/>
+            <a:ext cx="960120" cy="182880"/>
+          </a:xfrm>
+          <a:prstGeom prst="roundRect">
             <a:avLst/>
           </a:prstGeom>
           <a:solidFill>
-            <a:srgbClr val="E6E9FB"/>
+            <a:srgbClr val="BFE8EA"/>
           </a:solidFill>
           <a:ln>
             <a:noFill/>
@@ -5393,20 +6114,20 @@
       </p:sp>
       <p:sp>
         <p:nvSpPr>
-          <p:cNvPr id="3" name="Rectangle 2"/>
+          <p:cNvPr id="3" name="Rounded Rectangle 2"/>
           <p:cNvSpPr/>
           <p:nvPr/>
         </p:nvSpPr>
         <p:spPr>
           <a:xfrm>
-            <a:off x="0" y="0"/>
-            <a:ext cx="7558850" cy="91440"/>
-          </a:xfrm>
-          <a:prstGeom prst="rect">
+            <a:off x="11140135" y="713232"/>
+            <a:ext cx="658368" cy="182880"/>
+          </a:xfrm>
+          <a:prstGeom prst="roundRect">
             <a:avLst/>
           </a:prstGeom>
           <a:solidFill>
-            <a:srgbClr val="1B2559"/>
+            <a:srgbClr val="FBF3C4"/>
           </a:solidFill>
           <a:ln>
             <a:noFill/>
@@ -5437,20 +6158,22 @@
       </p:sp>
       <p:sp>
         <p:nvSpPr>
-          <p:cNvPr id="4" name="Rectangle 3"/>
+          <p:cNvPr id="4" name="Rounded Rectangle 3"/>
           <p:cNvSpPr/>
           <p:nvPr/>
         </p:nvSpPr>
         <p:spPr>
           <a:xfrm>
-            <a:off x="7558850" y="0"/>
-            <a:ext cx="4632844" cy="91440"/>
-          </a:xfrm>
-          <a:prstGeom prst="rect">
-            <a:avLst/>
+            <a:off x="548640" y="365760"/>
+            <a:ext cx="6291072" cy="566928"/>
+          </a:xfrm>
+          <a:prstGeom prst="roundRect">
+            <a:avLst>
+              <a:gd name="adj" fmla="val 12000"/>
+            </a:avLst>
           </a:prstGeom>
           <a:solidFill>
-            <a:srgbClr val="D6336C"/>
+            <a:srgbClr val="00A5B5"/>
           </a:solidFill>
           <a:ln>
             <a:noFill/>
@@ -5488,7 +6211,7 @@
         <p:spPr>
           <a:xfrm>
             <a:off x="548640" y="384048"/>
-            <a:ext cx="9265615" cy="640080"/>
+            <a:ext cx="6291072" cy="530352"/>
           </a:xfrm>
           <a:prstGeom prst="rect">
             <a:avLst/>
@@ -5501,21 +6224,21 @@
           </a:bodyPr>
           <a:lstStyle/>
           <a:p>
-            <a:pPr algn="l">
+            <a:pPr algn="ctr">
               <a:lnSpc>
                 <a:spcPct val="130000"/>
               </a:lnSpc>
-              <a:defRPr sz="2800"/>
+              <a:defRPr sz="2300"/>
             </a:pPr>
             <a:r>
-              <a:rPr sz="2800" b="1" u="none">
-                <a:solidFill>
-                  <a:srgbClr val="1B2559"/>
+              <a:rPr sz="2300" b="1" u="none">
+                <a:solidFill>
+                  <a:srgbClr val="FFFFFF"/>
                 </a:solidFill>
                 <a:latin typeface="Times New Roman"/>
                 <a:ea typeface="Noto Sans CJK SC"/>
               </a:rPr>
-              <a:t>二、词性转换（每空1分，共10分）</a:t>
+              <a:t>【二、词性转换（每空1分，共10分）】</a:t>
             </a:r>
           </a:p>
         </p:txBody>
@@ -5523,47 +6246,6 @@
       <p:sp>
         <p:nvSpPr>
           <p:cNvPr id="6" name="TextBox 5"/>
-          <p:cNvSpPr txBox="1"/>
-          <p:nvPr/>
-        </p:nvSpPr>
-        <p:spPr>
-          <a:xfrm>
-            <a:off x="9082735" y="457200"/>
-            <a:ext cx="2606040" cy="457200"/>
-          </a:xfrm>
-          <a:prstGeom prst="rect">
-            <a:avLst/>
-          </a:prstGeom>
-          <a:noFill/>
-        </p:spPr>
-        <p:txBody>
-          <a:bodyPr wrap="square" anchor="t" lIns="54864" rIns="54864" tIns="0" bIns="0">
-            <a:spAutoFit/>
-          </a:bodyPr>
-          <a:lstStyle/>
-          <a:p>
-            <a:pPr algn="r">
-              <a:lnSpc>
-                <a:spcPct val="130000"/>
-              </a:lnSpc>
-              <a:defRPr sz="1200"/>
-            </a:pPr>
-            <a:r>
-              <a:rPr sz="1200" b="1" u="none">
-                <a:solidFill>
-                  <a:srgbClr val="D6336C"/>
-                </a:solidFill>
-                <a:latin typeface="Times New Roman"/>
-                <a:ea typeface="Noto Sans CJK SC"/>
-              </a:rPr>
-              <a:t>二、词性转换（每空1</a:t>
-            </a:r>
-          </a:p>
-        </p:txBody>
-      </p:sp>
-      <p:sp>
-        <p:nvSpPr>
-          <p:cNvPr id="7" name="TextBox 6"/>
           <p:cNvSpPr txBox="1"/>
           <p:nvPr/>
         </p:nvSpPr>
@@ -5592,7 +6274,7 @@
             <a:r>
               <a:rPr sz="2400" b="0" u="none">
                 <a:solidFill>
-                  <a:srgbClr val="1A1F36"/>
+                  <a:srgbClr val="16323A"/>
                 </a:solidFill>
                 <a:latin typeface="Times New Roman"/>
                 <a:ea typeface="Noto Sans CJK SC"/>
@@ -5612,7 +6294,7 @@
             <a:r>
               <a:rPr sz="2400" b="0" u="none">
                 <a:solidFill>
-                  <a:srgbClr val="1A1F36"/>
+                  <a:srgbClr val="16323A"/>
                 </a:solidFill>
                 <a:latin typeface="Times New Roman"/>
                 <a:ea typeface="Noto Sans CJK SC"/>
@@ -5632,7 +6314,7 @@
             <a:r>
               <a:rPr sz="2400" b="0" u="none">
                 <a:solidFill>
-                  <a:srgbClr val="1A1F36"/>
+                  <a:srgbClr val="16323A"/>
                 </a:solidFill>
                 <a:latin typeface="Times New Roman"/>
                 <a:ea typeface="Noto Sans CJK SC"/>
@@ -5652,7 +6334,7 @@
             <a:r>
               <a:rPr sz="2400" b="0" u="none">
                 <a:solidFill>
-                  <a:srgbClr val="1A1F36"/>
+                  <a:srgbClr val="16323A"/>
                 </a:solidFill>
                 <a:latin typeface="Times New Roman"/>
                 <a:ea typeface="Noto Sans CJK SC"/>
@@ -5672,7 +6354,7 @@
             <a:r>
               <a:rPr sz="2400" b="0" u="none">
                 <a:solidFill>
-                  <a:srgbClr val="1A1F36"/>
+                  <a:srgbClr val="16323A"/>
                 </a:solidFill>
                 <a:latin typeface="Times New Roman"/>
                 <a:ea typeface="Noto Sans CJK SC"/>
@@ -5684,7 +6366,7 @@
       </p:sp>
       <p:sp>
         <p:nvSpPr>
-          <p:cNvPr id="8" name="Rectangle 7"/>
+          <p:cNvPr id="7" name="Rectangle 6"/>
           <p:cNvSpPr/>
           <p:nvPr/>
         </p:nvSpPr>
@@ -5697,7 +6379,7 @@
             <a:avLst/>
           </a:prstGeom>
           <a:solidFill>
-            <a:srgbClr val="D6336C"/>
+            <a:srgbClr val="00A5B5"/>
           </a:solidFill>
           <a:ln>
             <a:noFill/>
@@ -5728,14 +6410,14 @@
       </p:sp>
       <p:sp>
         <p:nvSpPr>
-          <p:cNvPr id="9" name="TextBox 8"/>
+          <p:cNvPr id="8" name="TextBox 7"/>
           <p:cNvSpPr txBox="1"/>
           <p:nvPr/>
         </p:nvSpPr>
         <p:spPr>
           <a:xfrm>
             <a:off x="548640" y="6345936"/>
-            <a:ext cx="8595360" cy="274320"/>
+            <a:ext cx="7498079" cy="274320"/>
           </a:xfrm>
           <a:prstGeom prst="rect">
             <a:avLst/>
@@ -5769,14 +6451,188 @@
       </p:sp>
       <p:sp>
         <p:nvSpPr>
+          <p:cNvPr id="9" name="Rounded Rectangle 8"/>
+          <p:cNvSpPr/>
+          <p:nvPr/>
+        </p:nvSpPr>
+        <p:spPr>
+          <a:xfrm>
+            <a:off x="8945575" y="6309360"/>
+            <a:ext cx="1481328" cy="310896"/>
+          </a:xfrm>
+          <a:prstGeom prst="roundRect">
+            <a:avLst>
+              <a:gd name="adj" fmla="val 40000"/>
+            </a:avLst>
+          </a:prstGeom>
+          <a:solidFill>
+            <a:srgbClr val="F2F4F8"/>
+          </a:solidFill>
+          <a:ln>
+            <a:noFill/>
+          </a:ln>
+          <a:effectLst/>
+        </p:spPr>
+        <p:style>
+          <a:lnRef idx="1">
+            <a:schemeClr val="accent1"/>
+          </a:lnRef>
+          <a:fillRef idx="3">
+            <a:schemeClr val="accent1"/>
+          </a:fillRef>
+          <a:effectRef idx="2">
+            <a:schemeClr val="accent1"/>
+          </a:effectRef>
+          <a:fontRef idx="minor">
+            <a:schemeClr val="lt1"/>
+          </a:fontRef>
+        </p:style>
+        <p:txBody>
+          <a:bodyPr rtlCol="0" anchor="ctr"/>
+          <a:lstStyle/>
+          <a:p>
+            <a:pPr algn="ctr"/>
+          </a:p>
+        </p:txBody>
+      </p:sp>
+      <p:sp>
+        <p:nvSpPr>
           <p:cNvPr id="10" name="TextBox 9"/>
           <p:cNvSpPr txBox="1"/>
           <p:nvPr/>
         </p:nvSpPr>
         <p:spPr>
           <a:xfrm>
-            <a:off x="11048695" y="6345936"/>
-            <a:ext cx="685800" cy="274320"/>
+            <a:off x="8945575" y="6318504"/>
+            <a:ext cx="1481328" cy="292608"/>
+          </a:xfrm>
+          <a:prstGeom prst="rect">
+            <a:avLst/>
+          </a:prstGeom>
+          <a:noFill/>
+        </p:spPr>
+        <p:txBody>
+          <a:bodyPr wrap="square" anchor="ctr" lIns="54864" rIns="54864" tIns="0" bIns="0">
+            <a:spAutoFit/>
+          </a:bodyPr>
+          <a:lstStyle/>
+          <a:p>
+            <a:pPr algn="ctr">
+              <a:lnSpc>
+                <a:spcPct val="130000"/>
+              </a:lnSpc>
+              <a:defRPr sz="900"/>
+            </a:pPr>
+            <a:r>
+              <a:rPr sz="900" b="1" u="none">
+                <a:solidFill>
+                  <a:srgbClr val="6B7280"/>
+                </a:solidFill>
+                <a:latin typeface="Times New Roman"/>
+                <a:ea typeface="Noto Sans CJK SC"/>
+              </a:rPr>
+              <a:t>核心词汇突破</a:t>
+            </a:r>
+          </a:p>
+        </p:txBody>
+      </p:sp>
+      <p:sp>
+        <p:nvSpPr>
+          <p:cNvPr id="11" name="Rounded Rectangle 10"/>
+          <p:cNvSpPr/>
+          <p:nvPr/>
+        </p:nvSpPr>
+        <p:spPr>
+          <a:xfrm>
+            <a:off x="10536631" y="6309360"/>
+            <a:ext cx="1481328" cy="310896"/>
+          </a:xfrm>
+          <a:prstGeom prst="roundRect">
+            <a:avLst>
+              <a:gd name="adj" fmla="val 40000"/>
+            </a:avLst>
+          </a:prstGeom>
+          <a:solidFill>
+            <a:srgbClr val="F2F4F8"/>
+          </a:solidFill>
+          <a:ln>
+            <a:noFill/>
+          </a:ln>
+          <a:effectLst/>
+        </p:spPr>
+        <p:style>
+          <a:lnRef idx="1">
+            <a:schemeClr val="accent1"/>
+          </a:lnRef>
+          <a:fillRef idx="3">
+            <a:schemeClr val="accent1"/>
+          </a:fillRef>
+          <a:effectRef idx="2">
+            <a:schemeClr val="accent1"/>
+          </a:effectRef>
+          <a:fontRef idx="minor">
+            <a:schemeClr val="lt1"/>
+          </a:fontRef>
+        </p:style>
+        <p:txBody>
+          <a:bodyPr rtlCol="0" anchor="ctr"/>
+          <a:lstStyle/>
+          <a:p>
+            <a:pPr algn="ctr"/>
+          </a:p>
+        </p:txBody>
+      </p:sp>
+      <p:sp>
+        <p:nvSpPr>
+          <p:cNvPr id="12" name="TextBox 11"/>
+          <p:cNvSpPr txBox="1"/>
+          <p:nvPr/>
+        </p:nvSpPr>
+        <p:spPr>
+          <a:xfrm>
+            <a:off x="10536631" y="6318504"/>
+            <a:ext cx="1481328" cy="292608"/>
+          </a:xfrm>
+          <a:prstGeom prst="rect">
+            <a:avLst/>
+          </a:prstGeom>
+          <a:noFill/>
+        </p:spPr>
+        <p:txBody>
+          <a:bodyPr wrap="square" anchor="ctr" lIns="54864" rIns="54864" tIns="0" bIns="0">
+            <a:spAutoFit/>
+          </a:bodyPr>
+          <a:lstStyle/>
+          <a:p>
+            <a:pPr algn="ctr">
+              <a:lnSpc>
+                <a:spcPct val="130000"/>
+              </a:lnSpc>
+              <a:defRPr sz="900"/>
+            </a:pPr>
+            <a:r>
+              <a:rPr sz="900" b="1" u="none">
+                <a:solidFill>
+                  <a:srgbClr val="6B7280"/>
+                </a:solidFill>
+                <a:latin typeface="Times New Roman"/>
+                <a:ea typeface="Noto Sans CJK SC"/>
+              </a:rPr>
+              <a:t>重点句型透视</a:t>
+            </a:r>
+          </a:p>
+        </p:txBody>
+      </p:sp>
+      <p:sp>
+        <p:nvSpPr>
+          <p:cNvPr id="13" name="TextBox 12"/>
+          <p:cNvSpPr txBox="1"/>
+          <p:nvPr/>
+        </p:nvSpPr>
+        <p:spPr>
+          <a:xfrm>
+            <a:off x="11688775" y="6345936"/>
+            <a:ext cx="320040" cy="274320"/>
           </a:xfrm>
           <a:prstGeom prst="rect">
             <a:avLst/>
@@ -5828,20 +6684,20 @@
       <p:grpSpPr/>
       <p:sp>
         <p:nvSpPr>
-          <p:cNvPr id="2" name="Rectangle 1"/>
+          <p:cNvPr id="2" name="Rounded Rectangle 1"/>
           <p:cNvSpPr/>
           <p:nvPr/>
         </p:nvSpPr>
         <p:spPr>
           <a:xfrm>
-            <a:off x="0" y="0"/>
-            <a:ext cx="201168" cy="6858000"/>
-          </a:xfrm>
-          <a:prstGeom prst="rect">
+            <a:off x="10042855" y="256032"/>
+            <a:ext cx="960120" cy="182880"/>
+          </a:xfrm>
+          <a:prstGeom prst="roundRect">
             <a:avLst/>
           </a:prstGeom>
           <a:solidFill>
-            <a:srgbClr val="E6E9FB"/>
+            <a:srgbClr val="BFE8EA"/>
           </a:solidFill>
           <a:ln>
             <a:noFill/>
@@ -5872,20 +6728,20 @@
       </p:sp>
       <p:sp>
         <p:nvSpPr>
-          <p:cNvPr id="3" name="Rectangle 2"/>
+          <p:cNvPr id="3" name="Rounded Rectangle 2"/>
           <p:cNvSpPr/>
           <p:nvPr/>
         </p:nvSpPr>
         <p:spPr>
           <a:xfrm>
-            <a:off x="0" y="0"/>
-            <a:ext cx="7558850" cy="91440"/>
-          </a:xfrm>
-          <a:prstGeom prst="rect">
+            <a:off x="11140135" y="713232"/>
+            <a:ext cx="658368" cy="182880"/>
+          </a:xfrm>
+          <a:prstGeom prst="roundRect">
             <a:avLst/>
           </a:prstGeom>
           <a:solidFill>
-            <a:srgbClr val="1B2559"/>
+            <a:srgbClr val="FBF3C4"/>
           </a:solidFill>
           <a:ln>
             <a:noFill/>
@@ -5916,20 +6772,22 @@
       </p:sp>
       <p:sp>
         <p:nvSpPr>
-          <p:cNvPr id="4" name="Rectangle 3"/>
+          <p:cNvPr id="4" name="Rounded Rectangle 3"/>
           <p:cNvSpPr/>
           <p:nvPr/>
         </p:nvSpPr>
         <p:spPr>
           <a:xfrm>
-            <a:off x="7558850" y="0"/>
-            <a:ext cx="4632844" cy="91440"/>
-          </a:xfrm>
-          <a:prstGeom prst="rect">
-            <a:avLst/>
+            <a:off x="548640" y="365760"/>
+            <a:ext cx="3803904" cy="566928"/>
+          </a:xfrm>
+          <a:prstGeom prst="roundRect">
+            <a:avLst>
+              <a:gd name="adj" fmla="val 12000"/>
+            </a:avLst>
           </a:prstGeom>
           <a:solidFill>
-            <a:srgbClr val="D6336C"/>
+            <a:srgbClr val="00A5B5"/>
           </a:solidFill>
           <a:ln>
             <a:noFill/>
@@ -5967,7 +6825,7 @@
         <p:spPr>
           <a:xfrm>
             <a:off x="548640" y="384048"/>
-            <a:ext cx="9265615" cy="640080"/>
+            <a:ext cx="3803904" cy="530352"/>
           </a:xfrm>
           <a:prstGeom prst="rect">
             <a:avLst/>
@@ -5980,21 +6838,21 @@
           </a:bodyPr>
           <a:lstStyle/>
           <a:p>
-            <a:pPr algn="l">
+            <a:pPr algn="ctr">
               <a:lnSpc>
                 <a:spcPct val="130000"/>
               </a:lnSpc>
-              <a:defRPr sz="2800"/>
+              <a:defRPr sz="2300"/>
             </a:pPr>
             <a:r>
-              <a:rPr sz="2800" b="1" u="none">
-                <a:solidFill>
-                  <a:srgbClr val="1B2559"/>
+              <a:rPr sz="2300" b="1" u="none">
+                <a:solidFill>
+                  <a:srgbClr val="FFFFFF"/>
                 </a:solidFill>
                 <a:latin typeface="Times New Roman"/>
                 <a:ea typeface="Noto Sans CJK SC"/>
               </a:rPr>
-              <a:t>三、读后续写微写作</a:t>
+              <a:t>【三、读后续写微写作】</a:t>
             </a:r>
           </a:p>
         </p:txBody>
@@ -6030,7 +6888,7 @@
             <a:r>
               <a:rPr sz="2600" b="0" u="none">
                 <a:solidFill>
-                  <a:srgbClr val="D6336C"/>
+                  <a:srgbClr val="00A5B5"/>
                 </a:solidFill>
                 <a:latin typeface="Times New Roman"/>
                 <a:ea typeface="Noto Sans CJK SC"/>
@@ -6040,7 +6898,7 @@
             <a:r>
               <a:rPr sz="2600" b="0" u="none">
                 <a:solidFill>
-                  <a:srgbClr val="1A1F36"/>
+                  <a:srgbClr val="16323A"/>
                 </a:solidFill>
                 <a:latin typeface="Times New Roman"/>
                 <a:ea typeface="Noto Sans CJK SC"/>
@@ -6060,7 +6918,7 @@
             <a:r>
               <a:rPr sz="2600" b="0" u="none">
                 <a:solidFill>
-                  <a:srgbClr val="D6336C"/>
+                  <a:srgbClr val="00A5B5"/>
                 </a:solidFill>
                 <a:latin typeface="Times New Roman"/>
                 <a:ea typeface="Noto Sans CJK SC"/>
@@ -6070,7 +6928,7 @@
             <a:r>
               <a:rPr sz="2600" b="0" u="none">
                 <a:solidFill>
-                  <a:srgbClr val="1A1F36"/>
+                  <a:srgbClr val="16323A"/>
                 </a:solidFill>
                 <a:latin typeface="Times New Roman"/>
                 <a:ea typeface="Noto Sans CJK SC"/>
@@ -6095,7 +6953,7 @@
             <a:avLst/>
           </a:prstGeom>
           <a:solidFill>
-            <a:srgbClr val="D6336C"/>
+            <a:srgbClr val="00A5B5"/>
           </a:solidFill>
           <a:ln>
             <a:noFill/>
@@ -6133,7 +6991,7 @@
         <p:spPr>
           <a:xfrm>
             <a:off x="548640" y="6345936"/>
-            <a:ext cx="8595360" cy="274320"/>
+            <a:ext cx="7498079" cy="274320"/>
           </a:xfrm>
           <a:prstGeom prst="rect">
             <a:avLst/>
@@ -6167,14 +7025,188 @@
       </p:sp>
       <p:sp>
         <p:nvSpPr>
-          <p:cNvPr id="9" name="TextBox 8"/>
+          <p:cNvPr id="9" name="Rounded Rectangle 8"/>
+          <p:cNvSpPr/>
+          <p:nvPr/>
+        </p:nvSpPr>
+        <p:spPr>
+          <a:xfrm>
+            <a:off x="8945575" y="6309360"/>
+            <a:ext cx="1481328" cy="310896"/>
+          </a:xfrm>
+          <a:prstGeom prst="roundRect">
+            <a:avLst>
+              <a:gd name="adj" fmla="val 40000"/>
+            </a:avLst>
+          </a:prstGeom>
+          <a:solidFill>
+            <a:srgbClr val="F2F4F8"/>
+          </a:solidFill>
+          <a:ln>
+            <a:noFill/>
+          </a:ln>
+          <a:effectLst/>
+        </p:spPr>
+        <p:style>
+          <a:lnRef idx="1">
+            <a:schemeClr val="accent1"/>
+          </a:lnRef>
+          <a:fillRef idx="3">
+            <a:schemeClr val="accent1"/>
+          </a:fillRef>
+          <a:effectRef idx="2">
+            <a:schemeClr val="accent1"/>
+          </a:effectRef>
+          <a:fontRef idx="minor">
+            <a:schemeClr val="lt1"/>
+          </a:fontRef>
+        </p:style>
+        <p:txBody>
+          <a:bodyPr rtlCol="0" anchor="ctr"/>
+          <a:lstStyle/>
+          <a:p>
+            <a:pPr algn="ctr"/>
+          </a:p>
+        </p:txBody>
+      </p:sp>
+      <p:sp>
+        <p:nvSpPr>
+          <p:cNvPr id="10" name="TextBox 9"/>
           <p:cNvSpPr txBox="1"/>
           <p:nvPr/>
         </p:nvSpPr>
         <p:spPr>
           <a:xfrm>
-            <a:off x="11048695" y="6345936"/>
-            <a:ext cx="685800" cy="274320"/>
+            <a:off x="8945575" y="6318504"/>
+            <a:ext cx="1481328" cy="292608"/>
+          </a:xfrm>
+          <a:prstGeom prst="rect">
+            <a:avLst/>
+          </a:prstGeom>
+          <a:noFill/>
+        </p:spPr>
+        <p:txBody>
+          <a:bodyPr wrap="square" anchor="ctr" lIns="54864" rIns="54864" tIns="0" bIns="0">
+            <a:spAutoFit/>
+          </a:bodyPr>
+          <a:lstStyle/>
+          <a:p>
+            <a:pPr algn="ctr">
+              <a:lnSpc>
+                <a:spcPct val="130000"/>
+              </a:lnSpc>
+              <a:defRPr sz="900"/>
+            </a:pPr>
+            <a:r>
+              <a:rPr sz="900" b="1" u="none">
+                <a:solidFill>
+                  <a:srgbClr val="6B7280"/>
+                </a:solidFill>
+                <a:latin typeface="Times New Roman"/>
+                <a:ea typeface="Noto Sans CJK SC"/>
+              </a:rPr>
+              <a:t>核心词汇突破</a:t>
+            </a:r>
+          </a:p>
+        </p:txBody>
+      </p:sp>
+      <p:sp>
+        <p:nvSpPr>
+          <p:cNvPr id="11" name="Rounded Rectangle 10"/>
+          <p:cNvSpPr/>
+          <p:nvPr/>
+        </p:nvSpPr>
+        <p:spPr>
+          <a:xfrm>
+            <a:off x="10536631" y="6309360"/>
+            <a:ext cx="1481328" cy="310896"/>
+          </a:xfrm>
+          <a:prstGeom prst="roundRect">
+            <a:avLst>
+              <a:gd name="adj" fmla="val 40000"/>
+            </a:avLst>
+          </a:prstGeom>
+          <a:solidFill>
+            <a:srgbClr val="F2F4F8"/>
+          </a:solidFill>
+          <a:ln>
+            <a:noFill/>
+          </a:ln>
+          <a:effectLst/>
+        </p:spPr>
+        <p:style>
+          <a:lnRef idx="1">
+            <a:schemeClr val="accent1"/>
+          </a:lnRef>
+          <a:fillRef idx="3">
+            <a:schemeClr val="accent1"/>
+          </a:fillRef>
+          <a:effectRef idx="2">
+            <a:schemeClr val="accent1"/>
+          </a:effectRef>
+          <a:fontRef idx="minor">
+            <a:schemeClr val="lt1"/>
+          </a:fontRef>
+        </p:style>
+        <p:txBody>
+          <a:bodyPr rtlCol="0" anchor="ctr"/>
+          <a:lstStyle/>
+          <a:p>
+            <a:pPr algn="ctr"/>
+          </a:p>
+        </p:txBody>
+      </p:sp>
+      <p:sp>
+        <p:nvSpPr>
+          <p:cNvPr id="12" name="TextBox 11"/>
+          <p:cNvSpPr txBox="1"/>
+          <p:nvPr/>
+        </p:nvSpPr>
+        <p:spPr>
+          <a:xfrm>
+            <a:off x="10536631" y="6318504"/>
+            <a:ext cx="1481328" cy="292608"/>
+          </a:xfrm>
+          <a:prstGeom prst="rect">
+            <a:avLst/>
+          </a:prstGeom>
+          <a:noFill/>
+        </p:spPr>
+        <p:txBody>
+          <a:bodyPr wrap="square" anchor="ctr" lIns="54864" rIns="54864" tIns="0" bIns="0">
+            <a:spAutoFit/>
+          </a:bodyPr>
+          <a:lstStyle/>
+          <a:p>
+            <a:pPr algn="ctr">
+              <a:lnSpc>
+                <a:spcPct val="130000"/>
+              </a:lnSpc>
+              <a:defRPr sz="900"/>
+            </a:pPr>
+            <a:r>
+              <a:rPr sz="900" b="1" u="none">
+                <a:solidFill>
+                  <a:srgbClr val="6B7280"/>
+                </a:solidFill>
+                <a:latin typeface="Times New Roman"/>
+                <a:ea typeface="Noto Sans CJK SC"/>
+              </a:rPr>
+              <a:t>重点句型透视</a:t>
+            </a:r>
+          </a:p>
+        </p:txBody>
+      </p:sp>
+      <p:sp>
+        <p:nvSpPr>
+          <p:cNvPr id="13" name="TextBox 12"/>
+          <p:cNvSpPr txBox="1"/>
+          <p:nvPr/>
+        </p:nvSpPr>
+        <p:spPr>
+          <a:xfrm>
+            <a:off x="11688775" y="6345936"/>
+            <a:ext cx="320040" cy="274320"/>
           </a:xfrm>
           <a:prstGeom prst="rect">
             <a:avLst/>
@@ -6226,20 +7258,20 @@
       <p:grpSpPr/>
       <p:sp>
         <p:nvSpPr>
-          <p:cNvPr id="2" name="Rectangle 1"/>
+          <p:cNvPr id="2" name="Rounded Rectangle 1"/>
           <p:cNvSpPr/>
           <p:nvPr/>
         </p:nvSpPr>
         <p:spPr>
           <a:xfrm>
-            <a:off x="0" y="0"/>
-            <a:ext cx="201168" cy="6858000"/>
-          </a:xfrm>
-          <a:prstGeom prst="rect">
+            <a:off x="10042855" y="256032"/>
+            <a:ext cx="960120" cy="182880"/>
+          </a:xfrm>
+          <a:prstGeom prst="roundRect">
             <a:avLst/>
           </a:prstGeom>
           <a:solidFill>
-            <a:srgbClr val="E6E9FB"/>
+            <a:srgbClr val="BFE8EA"/>
           </a:solidFill>
           <a:ln>
             <a:noFill/>
@@ -6270,20 +7302,20 @@
       </p:sp>
       <p:sp>
         <p:nvSpPr>
-          <p:cNvPr id="3" name="Rectangle 2"/>
+          <p:cNvPr id="3" name="Rounded Rectangle 2"/>
           <p:cNvSpPr/>
           <p:nvPr/>
         </p:nvSpPr>
         <p:spPr>
           <a:xfrm>
-            <a:off x="0" y="0"/>
-            <a:ext cx="7558850" cy="91440"/>
-          </a:xfrm>
-          <a:prstGeom prst="rect">
+            <a:off x="11140135" y="713232"/>
+            <a:ext cx="658368" cy="182880"/>
+          </a:xfrm>
+          <a:prstGeom prst="roundRect">
             <a:avLst/>
           </a:prstGeom>
           <a:solidFill>
-            <a:srgbClr val="1B2559"/>
+            <a:srgbClr val="FBF3C4"/>
           </a:solidFill>
           <a:ln>
             <a:noFill/>
@@ -6314,20 +7346,22 @@
       </p:sp>
       <p:sp>
         <p:nvSpPr>
-          <p:cNvPr id="4" name="Rectangle 3"/>
+          <p:cNvPr id="4" name="Rounded Rectangle 3"/>
           <p:cNvSpPr/>
           <p:nvPr/>
         </p:nvSpPr>
         <p:spPr>
           <a:xfrm>
-            <a:off x="7558850" y="0"/>
-            <a:ext cx="4632844" cy="91440"/>
-          </a:xfrm>
-          <a:prstGeom prst="rect">
-            <a:avLst/>
+            <a:off x="548640" y="365760"/>
+            <a:ext cx="4736592" cy="566928"/>
+          </a:xfrm>
+          <a:prstGeom prst="roundRect">
+            <a:avLst>
+              <a:gd name="adj" fmla="val 12000"/>
+            </a:avLst>
           </a:prstGeom>
           <a:solidFill>
-            <a:srgbClr val="D6336C"/>
+            <a:srgbClr val="00A5B5"/>
           </a:solidFill>
           <a:ln>
             <a:noFill/>
@@ -6365,7 +7399,7 @@
         <p:spPr>
           <a:xfrm>
             <a:off x="548640" y="384048"/>
-            <a:ext cx="9265615" cy="640080"/>
+            <a:ext cx="4736592" cy="530352"/>
           </a:xfrm>
           <a:prstGeom prst="rect">
             <a:avLst/>
@@ -6378,21 +7412,21 @@
           </a:bodyPr>
           <a:lstStyle/>
           <a:p>
-            <a:pPr algn="l">
+            <a:pPr algn="ctr">
               <a:lnSpc>
                 <a:spcPct val="130000"/>
               </a:lnSpc>
-              <a:defRPr sz="2800"/>
+              <a:defRPr sz="2300"/>
             </a:pPr>
             <a:r>
-              <a:rPr sz="2800" b="1" u="none">
-                <a:solidFill>
-                  <a:srgbClr val="1B2559"/>
+              <a:rPr sz="2300" b="1" u="none">
+                <a:solidFill>
+                  <a:srgbClr val="FFFFFF"/>
                 </a:solidFill>
                 <a:latin typeface="Times New Roman"/>
                 <a:ea typeface="Noto Sans CJK SC"/>
               </a:rPr>
-              <a:t>三、读后续写微写作｜对照</a:t>
+              <a:t>【三、读后续写微写作｜对照】</a:t>
             </a:r>
           </a:p>
         </p:txBody>
@@ -6472,7 +7506,7 @@
             <a:r>
               <a:rPr sz="1400" b="1" u="none">
                 <a:solidFill>
-                  <a:srgbClr val="1B2559"/>
+                  <a:srgbClr val="0B6E75"/>
                 </a:solidFill>
                 <a:latin typeface="Times New Roman"/>
                 <a:ea typeface="Noto Sans CJK SC"/>
@@ -6513,7 +7547,7 @@
             <a:r>
               <a:rPr sz="1900" b="0" u="none">
                 <a:solidFill>
-                  <a:srgbClr val="1A1F36"/>
+                  <a:srgbClr val="16323A"/>
                 </a:solidFill>
                 <a:latin typeface="Times New Roman"/>
                 <a:ea typeface="Noto Sans CJK SC"/>
@@ -6554,7 +7588,7 @@
             <a:r>
               <a:rPr sz="1400" b="1" u="none">
                 <a:solidFill>
-                  <a:srgbClr val="D6336C"/>
+                  <a:srgbClr val="00A5B5"/>
                 </a:solidFill>
                 <a:latin typeface="Times New Roman"/>
                 <a:ea typeface="Noto Sans CJK SC"/>
@@ -6595,7 +7629,7 @@
             <a:r>
               <a:rPr sz="1900" b="0" u="none">
                 <a:solidFill>
-                  <a:srgbClr val="1A1F36"/>
+                  <a:srgbClr val="16323A"/>
                 </a:solidFill>
                 <a:latin typeface="Times New Roman"/>
                 <a:ea typeface="Noto Sans CJK SC"/>
@@ -6620,7 +7654,7 @@
             <a:avLst/>
           </a:prstGeom>
           <a:solidFill>
-            <a:srgbClr val="D6336C"/>
+            <a:srgbClr val="00A5B5"/>
           </a:solidFill>
           <a:ln>
             <a:noFill/>
@@ -6658,7 +7692,7 @@
         <p:spPr>
           <a:xfrm>
             <a:off x="548640" y="6345936"/>
-            <a:ext cx="8595360" cy="274320"/>
+            <a:ext cx="7498079" cy="274320"/>
           </a:xfrm>
           <a:prstGeom prst="rect">
             <a:avLst/>
@@ -6692,14 +7726,188 @@
       </p:sp>
       <p:sp>
         <p:nvSpPr>
-          <p:cNvPr id="13" name="TextBox 12"/>
+          <p:cNvPr id="13" name="Rounded Rectangle 12"/>
+          <p:cNvSpPr/>
+          <p:nvPr/>
+        </p:nvSpPr>
+        <p:spPr>
+          <a:xfrm>
+            <a:off x="8945575" y="6309360"/>
+            <a:ext cx="1481328" cy="310896"/>
+          </a:xfrm>
+          <a:prstGeom prst="roundRect">
+            <a:avLst>
+              <a:gd name="adj" fmla="val 40000"/>
+            </a:avLst>
+          </a:prstGeom>
+          <a:solidFill>
+            <a:srgbClr val="F2F4F8"/>
+          </a:solidFill>
+          <a:ln>
+            <a:noFill/>
+          </a:ln>
+          <a:effectLst/>
+        </p:spPr>
+        <p:style>
+          <a:lnRef idx="1">
+            <a:schemeClr val="accent1"/>
+          </a:lnRef>
+          <a:fillRef idx="3">
+            <a:schemeClr val="accent1"/>
+          </a:fillRef>
+          <a:effectRef idx="2">
+            <a:schemeClr val="accent1"/>
+          </a:effectRef>
+          <a:fontRef idx="minor">
+            <a:schemeClr val="lt1"/>
+          </a:fontRef>
+        </p:style>
+        <p:txBody>
+          <a:bodyPr rtlCol="0" anchor="ctr"/>
+          <a:lstStyle/>
+          <a:p>
+            <a:pPr algn="ctr"/>
+          </a:p>
+        </p:txBody>
+      </p:sp>
+      <p:sp>
+        <p:nvSpPr>
+          <p:cNvPr id="14" name="TextBox 13"/>
           <p:cNvSpPr txBox="1"/>
           <p:nvPr/>
         </p:nvSpPr>
         <p:spPr>
           <a:xfrm>
-            <a:off x="11048695" y="6345936"/>
-            <a:ext cx="685800" cy="274320"/>
+            <a:off x="8945575" y="6318504"/>
+            <a:ext cx="1481328" cy="292608"/>
+          </a:xfrm>
+          <a:prstGeom prst="rect">
+            <a:avLst/>
+          </a:prstGeom>
+          <a:noFill/>
+        </p:spPr>
+        <p:txBody>
+          <a:bodyPr wrap="square" anchor="ctr" lIns="54864" rIns="54864" tIns="0" bIns="0">
+            <a:spAutoFit/>
+          </a:bodyPr>
+          <a:lstStyle/>
+          <a:p>
+            <a:pPr algn="ctr">
+              <a:lnSpc>
+                <a:spcPct val="130000"/>
+              </a:lnSpc>
+              <a:defRPr sz="900"/>
+            </a:pPr>
+            <a:r>
+              <a:rPr sz="900" b="1" u="none">
+                <a:solidFill>
+                  <a:srgbClr val="6B7280"/>
+                </a:solidFill>
+                <a:latin typeface="Times New Roman"/>
+                <a:ea typeface="Noto Sans CJK SC"/>
+              </a:rPr>
+              <a:t>核心词汇突破</a:t>
+            </a:r>
+          </a:p>
+        </p:txBody>
+      </p:sp>
+      <p:sp>
+        <p:nvSpPr>
+          <p:cNvPr id="15" name="Rounded Rectangle 14"/>
+          <p:cNvSpPr/>
+          <p:nvPr/>
+        </p:nvSpPr>
+        <p:spPr>
+          <a:xfrm>
+            <a:off x="10536631" y="6309360"/>
+            <a:ext cx="1481328" cy="310896"/>
+          </a:xfrm>
+          <a:prstGeom prst="roundRect">
+            <a:avLst>
+              <a:gd name="adj" fmla="val 40000"/>
+            </a:avLst>
+          </a:prstGeom>
+          <a:solidFill>
+            <a:srgbClr val="F2F4F8"/>
+          </a:solidFill>
+          <a:ln>
+            <a:noFill/>
+          </a:ln>
+          <a:effectLst/>
+        </p:spPr>
+        <p:style>
+          <a:lnRef idx="1">
+            <a:schemeClr val="accent1"/>
+          </a:lnRef>
+          <a:fillRef idx="3">
+            <a:schemeClr val="accent1"/>
+          </a:fillRef>
+          <a:effectRef idx="2">
+            <a:schemeClr val="accent1"/>
+          </a:effectRef>
+          <a:fontRef idx="minor">
+            <a:schemeClr val="lt1"/>
+          </a:fontRef>
+        </p:style>
+        <p:txBody>
+          <a:bodyPr rtlCol="0" anchor="ctr"/>
+          <a:lstStyle/>
+          <a:p>
+            <a:pPr algn="ctr"/>
+          </a:p>
+        </p:txBody>
+      </p:sp>
+      <p:sp>
+        <p:nvSpPr>
+          <p:cNvPr id="16" name="TextBox 15"/>
+          <p:cNvSpPr txBox="1"/>
+          <p:nvPr/>
+        </p:nvSpPr>
+        <p:spPr>
+          <a:xfrm>
+            <a:off x="10536631" y="6318504"/>
+            <a:ext cx="1481328" cy="292608"/>
+          </a:xfrm>
+          <a:prstGeom prst="rect">
+            <a:avLst/>
+          </a:prstGeom>
+          <a:noFill/>
+        </p:spPr>
+        <p:txBody>
+          <a:bodyPr wrap="square" anchor="ctr" lIns="54864" rIns="54864" tIns="0" bIns="0">
+            <a:spAutoFit/>
+          </a:bodyPr>
+          <a:lstStyle/>
+          <a:p>
+            <a:pPr algn="ctr">
+              <a:lnSpc>
+                <a:spcPct val="130000"/>
+              </a:lnSpc>
+              <a:defRPr sz="900"/>
+            </a:pPr>
+            <a:r>
+              <a:rPr sz="900" b="1" u="none">
+                <a:solidFill>
+                  <a:srgbClr val="6B7280"/>
+                </a:solidFill>
+                <a:latin typeface="Times New Roman"/>
+                <a:ea typeface="Noto Sans CJK SC"/>
+              </a:rPr>
+              <a:t>重点句型透视</a:t>
+            </a:r>
+          </a:p>
+        </p:txBody>
+      </p:sp>
+      <p:sp>
+        <p:nvSpPr>
+          <p:cNvPr id="17" name="TextBox 16"/>
+          <p:cNvSpPr txBox="1"/>
+          <p:nvPr/>
+        </p:nvSpPr>
+        <p:spPr>
+          <a:xfrm>
+            <a:off x="11688775" y="6345936"/>
+            <a:ext cx="320040" cy="274320"/>
           </a:xfrm>
           <a:prstGeom prst="rect">
             <a:avLst/>
@@ -6751,20 +7959,20 @@
       <p:grpSpPr/>
       <p:sp>
         <p:nvSpPr>
-          <p:cNvPr id="2" name="Rectangle 1"/>
+          <p:cNvPr id="2" name="Rounded Rectangle 1"/>
           <p:cNvSpPr/>
           <p:nvPr/>
         </p:nvSpPr>
         <p:spPr>
           <a:xfrm>
-            <a:off x="0" y="0"/>
-            <a:ext cx="201168" cy="6858000"/>
-          </a:xfrm>
-          <a:prstGeom prst="rect">
+            <a:off x="10042855" y="256032"/>
+            <a:ext cx="960120" cy="182880"/>
+          </a:xfrm>
+          <a:prstGeom prst="roundRect">
             <a:avLst/>
           </a:prstGeom>
           <a:solidFill>
-            <a:srgbClr val="E6E9FB"/>
+            <a:srgbClr val="BFE8EA"/>
           </a:solidFill>
           <a:ln>
             <a:noFill/>
@@ -6795,20 +8003,20 @@
       </p:sp>
       <p:sp>
         <p:nvSpPr>
-          <p:cNvPr id="3" name="Rectangle 2"/>
+          <p:cNvPr id="3" name="Rounded Rectangle 2"/>
           <p:cNvSpPr/>
           <p:nvPr/>
         </p:nvSpPr>
         <p:spPr>
           <a:xfrm>
-            <a:off x="0" y="0"/>
-            <a:ext cx="7558850" cy="91440"/>
-          </a:xfrm>
-          <a:prstGeom prst="rect">
+            <a:off x="11140135" y="713232"/>
+            <a:ext cx="658368" cy="182880"/>
+          </a:xfrm>
+          <a:prstGeom prst="roundRect">
             <a:avLst/>
           </a:prstGeom>
           <a:solidFill>
-            <a:srgbClr val="1B2559"/>
+            <a:srgbClr val="FBF3C4"/>
           </a:solidFill>
           <a:ln>
             <a:noFill/>
@@ -6839,20 +8047,22 @@
       </p:sp>
       <p:sp>
         <p:nvSpPr>
-          <p:cNvPr id="4" name="Rectangle 3"/>
+          <p:cNvPr id="4" name="Rounded Rectangle 3"/>
           <p:cNvSpPr/>
           <p:nvPr/>
         </p:nvSpPr>
         <p:spPr>
           <a:xfrm>
-            <a:off x="7558850" y="0"/>
-            <a:ext cx="4632844" cy="91440"/>
-          </a:xfrm>
-          <a:prstGeom prst="rect">
-            <a:avLst/>
+            <a:off x="548640" y="365760"/>
+            <a:ext cx="2871216" cy="566928"/>
+          </a:xfrm>
+          <a:prstGeom prst="roundRect">
+            <a:avLst>
+              <a:gd name="adj" fmla="val 12000"/>
+            </a:avLst>
           </a:prstGeom>
           <a:solidFill>
-            <a:srgbClr val="D6336C"/>
+            <a:srgbClr val="00A5B5"/>
           </a:solidFill>
           <a:ln>
             <a:noFill/>
@@ -6890,7 +8100,7 @@
         <p:spPr>
           <a:xfrm>
             <a:off x="548640" y="384048"/>
-            <a:ext cx="9265615" cy="640080"/>
+            <a:ext cx="2871216" cy="530352"/>
           </a:xfrm>
           <a:prstGeom prst="rect">
             <a:avLst/>
@@ -6903,21 +8113,21 @@
           </a:bodyPr>
           <a:lstStyle/>
           <a:p>
-            <a:pPr algn="l">
+            <a:pPr algn="ctr">
               <a:lnSpc>
                 <a:spcPct val="130000"/>
               </a:lnSpc>
-              <a:defRPr sz="2800"/>
+              <a:defRPr sz="2300"/>
             </a:pPr>
             <a:r>
-              <a:rPr sz="2800" b="1" u="none">
-                <a:solidFill>
-                  <a:srgbClr val="1B2559"/>
+              <a:rPr sz="2300" b="1" u="none">
+                <a:solidFill>
+                  <a:srgbClr val="FFFFFF"/>
                 </a:solidFill>
                 <a:latin typeface="Times New Roman"/>
                 <a:ea typeface="Noto Sans CJK SC"/>
               </a:rPr>
-              <a:t>四、话题评测</a:t>
+              <a:t>【四、话题评测】</a:t>
             </a:r>
           </a:p>
         </p:txBody>
@@ -6953,7 +8163,7 @@
             <a:r>
               <a:rPr sz="2400" b="0" u="none">
                 <a:solidFill>
-                  <a:srgbClr val="1A1F36"/>
+                  <a:srgbClr val="16323A"/>
                 </a:solidFill>
                 <a:latin typeface="Times New Roman"/>
                 <a:ea typeface="Noto Sans CJK SC"/>
@@ -6973,7 +8183,7 @@
             <a:r>
               <a:rPr sz="2400" b="0" u="none">
                 <a:solidFill>
-                  <a:srgbClr val="D6336C"/>
+                  <a:srgbClr val="00A5B5"/>
                 </a:solidFill>
                 <a:latin typeface="Times New Roman"/>
                 <a:ea typeface="Noto Sans CJK SC"/>
@@ -6983,7 +8193,7 @@
             <a:r>
               <a:rPr sz="2400" b="0" u="none">
                 <a:solidFill>
-                  <a:srgbClr val="1A1F36"/>
+                  <a:srgbClr val="16323A"/>
                 </a:solidFill>
                 <a:latin typeface="Times New Roman"/>
                 <a:ea typeface="Noto Sans CJK SC"/>
@@ -7003,7 +8213,7 @@
             <a:r>
               <a:rPr sz="2400" b="0" u="none">
                 <a:solidFill>
-                  <a:srgbClr val="1A1F36"/>
+                  <a:srgbClr val="16323A"/>
                 </a:solidFill>
                 <a:latin typeface="Times New Roman"/>
                 <a:ea typeface="Noto Sans CJK SC"/>
@@ -7023,7 +8233,7 @@
             <a:r>
               <a:rPr sz="2400" b="0" u="none">
                 <a:solidFill>
-                  <a:srgbClr val="D6336C"/>
+                  <a:srgbClr val="00A5B5"/>
                 </a:solidFill>
                 <a:latin typeface="Times New Roman"/>
                 <a:ea typeface="Noto Sans CJK SC"/>
@@ -7033,7 +8243,7 @@
             <a:r>
               <a:rPr sz="2400" b="0" u="none">
                 <a:solidFill>
-                  <a:srgbClr val="1A1F36"/>
+                  <a:srgbClr val="16323A"/>
                 </a:solidFill>
                 <a:latin typeface="Times New Roman"/>
                 <a:ea typeface="Noto Sans CJK SC"/>
@@ -7058,7 +8268,7 @@
             <a:avLst/>
           </a:prstGeom>
           <a:solidFill>
-            <a:srgbClr val="D6336C"/>
+            <a:srgbClr val="00A5B5"/>
           </a:solidFill>
           <a:ln>
             <a:noFill/>
@@ -7096,7 +8306,7 @@
         <p:spPr>
           <a:xfrm>
             <a:off x="548640" y="6345936"/>
-            <a:ext cx="8595360" cy="274320"/>
+            <a:ext cx="7498079" cy="274320"/>
           </a:xfrm>
           <a:prstGeom prst="rect">
             <a:avLst/>
@@ -7130,14 +8340,188 @@
       </p:sp>
       <p:sp>
         <p:nvSpPr>
-          <p:cNvPr id="9" name="TextBox 8"/>
+          <p:cNvPr id="9" name="Rounded Rectangle 8"/>
+          <p:cNvSpPr/>
+          <p:nvPr/>
+        </p:nvSpPr>
+        <p:spPr>
+          <a:xfrm>
+            <a:off x="8945575" y="6309360"/>
+            <a:ext cx="1481328" cy="310896"/>
+          </a:xfrm>
+          <a:prstGeom prst="roundRect">
+            <a:avLst>
+              <a:gd name="adj" fmla="val 40000"/>
+            </a:avLst>
+          </a:prstGeom>
+          <a:solidFill>
+            <a:srgbClr val="F2F4F8"/>
+          </a:solidFill>
+          <a:ln>
+            <a:noFill/>
+          </a:ln>
+          <a:effectLst/>
+        </p:spPr>
+        <p:style>
+          <a:lnRef idx="1">
+            <a:schemeClr val="accent1"/>
+          </a:lnRef>
+          <a:fillRef idx="3">
+            <a:schemeClr val="accent1"/>
+          </a:fillRef>
+          <a:effectRef idx="2">
+            <a:schemeClr val="accent1"/>
+          </a:effectRef>
+          <a:fontRef idx="minor">
+            <a:schemeClr val="lt1"/>
+          </a:fontRef>
+        </p:style>
+        <p:txBody>
+          <a:bodyPr rtlCol="0" anchor="ctr"/>
+          <a:lstStyle/>
+          <a:p>
+            <a:pPr algn="ctr"/>
+          </a:p>
+        </p:txBody>
+      </p:sp>
+      <p:sp>
+        <p:nvSpPr>
+          <p:cNvPr id="10" name="TextBox 9"/>
           <p:cNvSpPr txBox="1"/>
           <p:nvPr/>
         </p:nvSpPr>
         <p:spPr>
           <a:xfrm>
-            <a:off x="11048695" y="6345936"/>
-            <a:ext cx="685800" cy="274320"/>
+            <a:off x="8945575" y="6318504"/>
+            <a:ext cx="1481328" cy="292608"/>
+          </a:xfrm>
+          <a:prstGeom prst="rect">
+            <a:avLst/>
+          </a:prstGeom>
+          <a:noFill/>
+        </p:spPr>
+        <p:txBody>
+          <a:bodyPr wrap="square" anchor="ctr" lIns="54864" rIns="54864" tIns="0" bIns="0">
+            <a:spAutoFit/>
+          </a:bodyPr>
+          <a:lstStyle/>
+          <a:p>
+            <a:pPr algn="ctr">
+              <a:lnSpc>
+                <a:spcPct val="130000"/>
+              </a:lnSpc>
+              <a:defRPr sz="900"/>
+            </a:pPr>
+            <a:r>
+              <a:rPr sz="900" b="1" u="none">
+                <a:solidFill>
+                  <a:srgbClr val="6B7280"/>
+                </a:solidFill>
+                <a:latin typeface="Times New Roman"/>
+                <a:ea typeface="Noto Sans CJK SC"/>
+              </a:rPr>
+              <a:t>核心词汇突破</a:t>
+            </a:r>
+          </a:p>
+        </p:txBody>
+      </p:sp>
+      <p:sp>
+        <p:nvSpPr>
+          <p:cNvPr id="11" name="Rounded Rectangle 10"/>
+          <p:cNvSpPr/>
+          <p:nvPr/>
+        </p:nvSpPr>
+        <p:spPr>
+          <a:xfrm>
+            <a:off x="10536631" y="6309360"/>
+            <a:ext cx="1481328" cy="310896"/>
+          </a:xfrm>
+          <a:prstGeom prst="roundRect">
+            <a:avLst>
+              <a:gd name="adj" fmla="val 40000"/>
+            </a:avLst>
+          </a:prstGeom>
+          <a:solidFill>
+            <a:srgbClr val="F2F4F8"/>
+          </a:solidFill>
+          <a:ln>
+            <a:noFill/>
+          </a:ln>
+          <a:effectLst/>
+        </p:spPr>
+        <p:style>
+          <a:lnRef idx="1">
+            <a:schemeClr val="accent1"/>
+          </a:lnRef>
+          <a:fillRef idx="3">
+            <a:schemeClr val="accent1"/>
+          </a:fillRef>
+          <a:effectRef idx="2">
+            <a:schemeClr val="accent1"/>
+          </a:effectRef>
+          <a:fontRef idx="minor">
+            <a:schemeClr val="lt1"/>
+          </a:fontRef>
+        </p:style>
+        <p:txBody>
+          <a:bodyPr rtlCol="0" anchor="ctr"/>
+          <a:lstStyle/>
+          <a:p>
+            <a:pPr algn="ctr"/>
+          </a:p>
+        </p:txBody>
+      </p:sp>
+      <p:sp>
+        <p:nvSpPr>
+          <p:cNvPr id="12" name="TextBox 11"/>
+          <p:cNvSpPr txBox="1"/>
+          <p:nvPr/>
+        </p:nvSpPr>
+        <p:spPr>
+          <a:xfrm>
+            <a:off x="10536631" y="6318504"/>
+            <a:ext cx="1481328" cy="292608"/>
+          </a:xfrm>
+          <a:prstGeom prst="rect">
+            <a:avLst/>
+          </a:prstGeom>
+          <a:noFill/>
+        </p:spPr>
+        <p:txBody>
+          <a:bodyPr wrap="square" anchor="ctr" lIns="54864" rIns="54864" tIns="0" bIns="0">
+            <a:spAutoFit/>
+          </a:bodyPr>
+          <a:lstStyle/>
+          <a:p>
+            <a:pPr algn="ctr">
+              <a:lnSpc>
+                <a:spcPct val="130000"/>
+              </a:lnSpc>
+              <a:defRPr sz="900"/>
+            </a:pPr>
+            <a:r>
+              <a:rPr sz="900" b="1" u="none">
+                <a:solidFill>
+                  <a:srgbClr val="6B7280"/>
+                </a:solidFill>
+                <a:latin typeface="Times New Roman"/>
+                <a:ea typeface="Noto Sans CJK SC"/>
+              </a:rPr>
+              <a:t>重点句型透视</a:t>
+            </a:r>
+          </a:p>
+        </p:txBody>
+      </p:sp>
+      <p:sp>
+        <p:nvSpPr>
+          <p:cNvPr id="13" name="TextBox 12"/>
+          <p:cNvSpPr txBox="1"/>
+          <p:nvPr/>
+        </p:nvSpPr>
+        <p:spPr>
+          <a:xfrm>
+            <a:off x="11688775" y="6345936"/>
+            <a:ext cx="320040" cy="274320"/>
           </a:xfrm>
           <a:prstGeom prst="rect">
             <a:avLst/>
@@ -7202,7 +8586,7 @@
             <a:avLst/>
           </a:prstGeom>
           <a:solidFill>
-            <a:srgbClr val="1B2559"/>
+            <a:srgbClr val="FFFFFF"/>
           </a:solidFill>
           <a:ln>
             <a:noFill/>
@@ -7239,14 +8623,14 @@
         </p:nvSpPr>
         <p:spPr>
           <a:xfrm>
-            <a:off x="0" y="6711696"/>
-            <a:ext cx="12191695" cy="146304"/>
+            <a:off x="0" y="0"/>
+            <a:ext cx="12191695" cy="109728"/>
           </a:xfrm>
           <a:prstGeom prst="rect">
             <a:avLst/>
           </a:prstGeom>
           <a:solidFill>
-            <a:srgbClr val="D6336C"/>
+            <a:srgbClr val="0B6E75"/>
           </a:solidFill>
           <a:ln>
             <a:noFill/>
@@ -7277,14 +8661,102 @@
       </p:sp>
       <p:sp>
         <p:nvSpPr>
-          <p:cNvPr id="4" name="TextBox 3"/>
+          <p:cNvPr id="4" name="Rectangle 3"/>
+          <p:cNvSpPr/>
+          <p:nvPr/>
+        </p:nvSpPr>
+        <p:spPr>
+          <a:xfrm>
+            <a:off x="0" y="6748272"/>
+            <a:ext cx="12191695" cy="109728"/>
+          </a:xfrm>
+          <a:prstGeom prst="rect">
+            <a:avLst/>
+          </a:prstGeom>
+          <a:solidFill>
+            <a:srgbClr val="00A5B5"/>
+          </a:solidFill>
+          <a:ln>
+            <a:noFill/>
+          </a:ln>
+          <a:effectLst/>
+        </p:spPr>
+        <p:style>
+          <a:lnRef idx="1">
+            <a:schemeClr val="accent1"/>
+          </a:lnRef>
+          <a:fillRef idx="3">
+            <a:schemeClr val="accent1"/>
+          </a:fillRef>
+          <a:effectRef idx="2">
+            <a:schemeClr val="accent1"/>
+          </a:effectRef>
+          <a:fontRef idx="minor">
+            <a:schemeClr val="lt1"/>
+          </a:fontRef>
+        </p:style>
+        <p:txBody>
+          <a:bodyPr rtlCol="0" anchor="ctr"/>
+          <a:lstStyle/>
+          <a:p>
+            <a:pPr algn="ctr"/>
+          </a:p>
+        </p:txBody>
+      </p:sp>
+      <p:sp>
+        <p:nvSpPr>
+          <p:cNvPr id="5" name="Rectangle 4"/>
+          <p:cNvSpPr/>
+          <p:nvPr/>
+        </p:nvSpPr>
+        <p:spPr>
+          <a:xfrm>
+            <a:off x="777240" y="2331720"/>
+            <a:ext cx="128016" cy="1371600"/>
+          </a:xfrm>
+          <a:prstGeom prst="rect">
+            <a:avLst/>
+          </a:prstGeom>
+          <a:solidFill>
+            <a:srgbClr val="00A5B5"/>
+          </a:solidFill>
+          <a:ln>
+            <a:noFill/>
+          </a:ln>
+          <a:effectLst/>
+        </p:spPr>
+        <p:style>
+          <a:lnRef idx="1">
+            <a:schemeClr val="accent1"/>
+          </a:lnRef>
+          <a:fillRef idx="3">
+            <a:schemeClr val="accent1"/>
+          </a:fillRef>
+          <a:effectRef idx="2">
+            <a:schemeClr val="accent1"/>
+          </a:effectRef>
+          <a:fontRef idx="minor">
+            <a:schemeClr val="lt1"/>
+          </a:fontRef>
+        </p:style>
+        <p:txBody>
+          <a:bodyPr rtlCol="0" anchor="ctr"/>
+          <a:lstStyle/>
+          <a:p>
+            <a:pPr algn="ctr"/>
+          </a:p>
+        </p:txBody>
+      </p:sp>
+      <p:sp>
+        <p:nvSpPr>
+          <p:cNvPr id="6" name="TextBox 5"/>
           <p:cNvSpPr txBox="1"/>
           <p:nvPr/>
         </p:nvSpPr>
         <p:spPr>
           <a:xfrm>
-            <a:off x="777240" y="1188720"/>
-            <a:ext cx="3657600" cy="1554480"/>
+            <a:off x="1143000" y="1234440"/>
+            <a:ext cx="3657600" cy="1463040"/>
           </a:xfrm>
           <a:prstGeom prst="rect">
             <a:avLst/>
@@ -7301,12 +8773,12 @@
               <a:lnSpc>
                 <a:spcPct val="130000"/>
               </a:lnSpc>
-              <a:defRPr sz="9200"/>
+              <a:defRPr sz="8800"/>
             </a:pPr>
             <a:r>
-              <a:rPr sz="9200" b="1" u="none">
-                <a:solidFill>
-                  <a:srgbClr val="D6336C"/>
+              <a:rPr sz="8800" b="1" u="none">
+                <a:solidFill>
+                  <a:srgbClr val="E8F6F7"/>
                 </a:solidFill>
                 <a:latin typeface="Times New Roman"/>
                 <a:ea typeface="Noto Sans CJK SC"/>
@@ -7318,14 +8790,14 @@
       </p:sp>
       <p:sp>
         <p:nvSpPr>
-          <p:cNvPr id="5" name="TextBox 4"/>
+          <p:cNvPr id="7" name="TextBox 6"/>
           <p:cNvSpPr txBox="1"/>
           <p:nvPr/>
         </p:nvSpPr>
         <p:spPr>
           <a:xfrm>
-            <a:off x="841248" y="2834640"/>
-            <a:ext cx="10180015" cy="1097280"/>
+            <a:off x="1143000" y="2377440"/>
+            <a:ext cx="9905695" cy="1005840"/>
           </a:xfrm>
           <a:prstGeom prst="rect">
             <a:avLst/>
@@ -7347,7 +8819,7 @@
             <a:r>
               <a:rPr sz="4000" b="1" u="none">
                 <a:solidFill>
-                  <a:srgbClr val="FFFFFF"/>
+                  <a:srgbClr val="0B6E75"/>
                 </a:solidFill>
                 <a:latin typeface="Times New Roman"/>
                 <a:ea typeface="Noto Sans CJK SC"/>
